--- a/assets/styles/pptx-reference.pptx
+++ b/assets/styles/pptx-reference.pptx
@@ -4,7 +4,16 @@
   <p:sldMasterIdLst>
     <p:sldMasterId id="2147483648" r:id="rId1"/>
   </p:sldMasterIdLst>
-  <p:sldSz cx="12191695" cy="6858000" type="screen4x3"/>
+  <p:notesMasterIdLst>
+    <p:notesMasterId r:id="rId6"/>
+  </p:notesMasterIdLst>
+  <p:sldIdLst>
+    <p:sldId id="256" r:id="rId2"/>
+    <p:sldId id="257" r:id="rId3"/>
+    <p:sldId id="258" r:id="rId4"/>
+    <p:sldId id="259" r:id="rId5"/>
+  </p:sldIdLst>
+  <p:sldSz cx="9144000" cy="5143500" type="screen16x9"/>
   <p:notesSz cx="6858000" cy="9144000"/>
   <p:defaultTextStyle>
     <a:defPPr>
@@ -101,7 +110,579 @@
       </a:defRPr>
     </a:lvl9pPr>
   </p:defaultTextStyle>
+  <p:extLst>
+    <p:ext uri="{EFAFB233-063F-42B5-8137-9DF3F51BA10A}">
+      <p15:sldGuideLst xmlns:p15="http://schemas.microsoft.com/office/powerpoint/2012/main">
+        <p15:guide id="1" orient="horz" pos="1620" userDrawn="1">
+          <p15:clr>
+            <a:srgbClr val="A4A3A4"/>
+          </p15:clr>
+        </p15:guide>
+        <p15:guide id="2" pos="2880" userDrawn="1">
+          <p15:clr>
+            <a:srgbClr val="A4A3A4"/>
+          </p15:clr>
+        </p15:guide>
+      </p15:sldGuideLst>
+    </p:ext>
+  </p:extLst>
 </p:presentation>
+</file>
+
+<file path=ppt/notesMasters/notesMaster1.xml><?xml version="1.0" encoding="utf-8"?>
+<p:notesMaster xmlns:a="http://schemas.openxmlformats.org/drawingml/2006/main" xmlns:r="http://schemas.openxmlformats.org/officeDocument/2006/relationships" xmlns:p="http://schemas.openxmlformats.org/presentationml/2006/main">
+  <p:cSld>
+    <p:bg>
+      <p:bgRef idx="1001">
+        <a:schemeClr val="bg1"/>
+      </p:bgRef>
+    </p:bg>
+    <p:spTree>
+      <p:nvGrpSpPr>
+        <p:cNvPr id="1" name=""/>
+        <p:cNvGrpSpPr/>
+        <p:nvPr/>
+      </p:nvGrpSpPr>
+      <p:grpSpPr>
+        <a:xfrm>
+          <a:off x="0" y="0"/>
+          <a:ext cx="0" cy="0"/>
+          <a:chOff x="0" y="0"/>
+          <a:chExt cx="0" cy="0"/>
+        </a:xfrm>
+      </p:grpSpPr>
+      <p:sp>
+        <p:nvSpPr>
+          <p:cNvPr id="2" name="Header Placeholder 1"/>
+          <p:cNvSpPr>
+            <a:spLocks noGrp="1"/>
+          </p:cNvSpPr>
+          <p:nvPr>
+            <p:ph type="hdr" sz="quarter"/>
+          </p:nvPr>
+        </p:nvSpPr>
+        <p:spPr>
+          <a:xfrm>
+            <a:off x="0" y="0"/>
+            <a:ext cx="2971800" cy="458788"/>
+          </a:xfrm>
+          <a:prstGeom prst="rect">
+            <a:avLst/>
+          </a:prstGeom>
+        </p:spPr>
+        <p:txBody>
+          <a:bodyPr vert="horz" lIns="91440" tIns="45720" rIns="91440" bIns="45720" rtlCol="0"/>
+          <a:lstStyle>
+            <a:lvl1pPr algn="l">
+              <a:defRPr sz="1200"/>
+            </a:lvl1pPr>
+          </a:lstStyle>
+          <a:p>
+            <a:endParaRPr lang="en-US"/>
+          </a:p>
+        </p:txBody>
+      </p:sp>
+      <p:sp>
+        <p:nvSpPr>
+          <p:cNvPr id="3" name="Date Placeholder 2"/>
+          <p:cNvSpPr>
+            <a:spLocks noGrp="1"/>
+          </p:cNvSpPr>
+          <p:nvPr>
+            <p:ph type="dt" idx="1"/>
+          </p:nvPr>
+        </p:nvSpPr>
+        <p:spPr>
+          <a:xfrm>
+            <a:off x="3884613" y="0"/>
+            <a:ext cx="2971800" cy="458788"/>
+          </a:xfrm>
+          <a:prstGeom prst="rect">
+            <a:avLst/>
+          </a:prstGeom>
+        </p:spPr>
+        <p:txBody>
+          <a:bodyPr vert="horz" lIns="91440" tIns="45720" rIns="91440" bIns="45720" rtlCol="0"/>
+          <a:lstStyle>
+            <a:lvl1pPr algn="r">
+              <a:defRPr sz="1200"/>
+            </a:lvl1pPr>
+          </a:lstStyle>
+          <a:p>
+            <a:fld id="{0F9C1CCF-B725-44A7-AA57-5E433BD85C9F}" type="datetimeFigureOut">
+              <a:rPr lang="en-US" smtClean="0"/>
+              <a:t>1/2/22</a:t>
+            </a:fld>
+            <a:endParaRPr lang="en-US"/>
+          </a:p>
+        </p:txBody>
+      </p:sp>
+      <p:sp>
+        <p:nvSpPr>
+          <p:cNvPr id="4" name="Slide Image Placeholder 3"/>
+          <p:cNvSpPr>
+            <a:spLocks noGrp="1" noRot="1" noChangeAspect="1"/>
+          </p:cNvSpPr>
+          <p:nvPr>
+            <p:ph type="sldImg" idx="2"/>
+          </p:nvPr>
+        </p:nvSpPr>
+        <p:spPr>
+          <a:xfrm>
+            <a:off x="685800" y="1143000"/>
+            <a:ext cx="5486400" cy="3086100"/>
+          </a:xfrm>
+          <a:prstGeom prst="rect">
+            <a:avLst/>
+          </a:prstGeom>
+          <a:noFill/>
+          <a:ln w="12700">
+            <a:solidFill>
+              <a:prstClr val="black"/>
+            </a:solidFill>
+          </a:ln>
+        </p:spPr>
+        <p:txBody>
+          <a:bodyPr vert="horz" lIns="91440" tIns="45720" rIns="91440" bIns="45720" rtlCol="0" anchor="ctr"/>
+          <a:lstStyle/>
+          <a:p>
+            <a:endParaRPr lang="en-US"/>
+          </a:p>
+        </p:txBody>
+      </p:sp>
+      <p:sp>
+        <p:nvSpPr>
+          <p:cNvPr id="5" name="Notes Placeholder 4"/>
+          <p:cNvSpPr>
+            <a:spLocks noGrp="1"/>
+          </p:cNvSpPr>
+          <p:nvPr>
+            <p:ph type="body" sz="quarter" idx="3"/>
+          </p:nvPr>
+        </p:nvSpPr>
+        <p:spPr>
+          <a:xfrm>
+            <a:off x="685800" y="4400550"/>
+            <a:ext cx="5486400" cy="3600450"/>
+          </a:xfrm>
+          <a:prstGeom prst="rect">
+            <a:avLst/>
+          </a:prstGeom>
+        </p:spPr>
+        <p:txBody>
+          <a:bodyPr vert="horz" lIns="91440" tIns="45720" rIns="91440" bIns="45720" rtlCol="0"/>
+          <a:lstStyle/>
+          <a:p>
+            <a:pPr lvl="0"/>
+            <a:r>
+              <a:rPr lang="en-US"/>
+              <a:t>Click to edit Master text styles</a:t>
+            </a:r>
+          </a:p>
+          <a:p>
+            <a:pPr lvl="1"/>
+            <a:r>
+              <a:rPr lang="en-US"/>
+              <a:t>Second level</a:t>
+            </a:r>
+          </a:p>
+          <a:p>
+            <a:pPr lvl="2"/>
+            <a:r>
+              <a:rPr lang="en-US"/>
+              <a:t>Third level</a:t>
+            </a:r>
+          </a:p>
+          <a:p>
+            <a:pPr lvl="3"/>
+            <a:r>
+              <a:rPr lang="en-US"/>
+              <a:t>Fourth level</a:t>
+            </a:r>
+          </a:p>
+          <a:p>
+            <a:pPr lvl="4"/>
+            <a:r>
+              <a:rPr lang="en-US"/>
+              <a:t>Fifth level</a:t>
+            </a:r>
+          </a:p>
+        </p:txBody>
+      </p:sp>
+      <p:sp>
+        <p:nvSpPr>
+          <p:cNvPr id="6" name="Footer Placeholder 5"/>
+          <p:cNvSpPr>
+            <a:spLocks noGrp="1"/>
+          </p:cNvSpPr>
+          <p:nvPr>
+            <p:ph type="ftr" sz="quarter" idx="4"/>
+          </p:nvPr>
+        </p:nvSpPr>
+        <p:spPr>
+          <a:xfrm>
+            <a:off x="0" y="8685213"/>
+            <a:ext cx="2971800" cy="458787"/>
+          </a:xfrm>
+          <a:prstGeom prst="rect">
+            <a:avLst/>
+          </a:prstGeom>
+        </p:spPr>
+        <p:txBody>
+          <a:bodyPr vert="horz" lIns="91440" tIns="45720" rIns="91440" bIns="45720" rtlCol="0" anchor="b"/>
+          <a:lstStyle>
+            <a:lvl1pPr algn="l">
+              <a:defRPr sz="1200"/>
+            </a:lvl1pPr>
+          </a:lstStyle>
+          <a:p>
+            <a:endParaRPr lang="en-US"/>
+          </a:p>
+        </p:txBody>
+      </p:sp>
+      <p:sp>
+        <p:nvSpPr>
+          <p:cNvPr id="7" name="Slide Number Placeholder 6"/>
+          <p:cNvSpPr>
+            <a:spLocks noGrp="1"/>
+          </p:cNvSpPr>
+          <p:nvPr>
+            <p:ph type="sldNum" sz="quarter" idx="5"/>
+          </p:nvPr>
+        </p:nvSpPr>
+        <p:spPr>
+          <a:xfrm>
+            <a:off x="3884613" y="8685213"/>
+            <a:ext cx="2971800" cy="458787"/>
+          </a:xfrm>
+          <a:prstGeom prst="rect">
+            <a:avLst/>
+          </a:prstGeom>
+        </p:spPr>
+        <p:txBody>
+          <a:bodyPr vert="horz" lIns="91440" tIns="45720" rIns="91440" bIns="45720" rtlCol="0" anchor="b"/>
+          <a:lstStyle>
+            <a:lvl1pPr algn="r">
+              <a:defRPr sz="1200"/>
+            </a:lvl1pPr>
+          </a:lstStyle>
+          <a:p>
+            <a:fld id="{18BDFEC3-8487-43E8-A154-7C12CBC1FFF2}" type="slidenum">
+              <a:rPr lang="en-US" smtClean="0"/>
+              <a:t>‹#›</a:t>
+            </a:fld>
+            <a:endParaRPr lang="en-US"/>
+          </a:p>
+        </p:txBody>
+      </p:sp>
+    </p:spTree>
+    <p:extLst>
+      <p:ext uri="{BB962C8B-B14F-4D97-AF65-F5344CB8AC3E}">
+        <p14:creationId xmlns:p14="http://schemas.microsoft.com/office/powerpoint/2010/main" val="3782709779"/>
+      </p:ext>
+    </p:extLst>
+  </p:cSld>
+  <p:clrMap bg1="lt1" tx1="dk1" bg2="lt2" tx2="dk2" accent1="accent1" accent2="accent2" accent3="accent3" accent4="accent4" accent5="accent5" accent6="accent6" hlink="hlink" folHlink="folHlink"/>
+  <p:notesStyle>
+    <a:lvl1pPr marL="0" algn="l" defTabSz="914400" rtl="0" eaLnBrk="1" latinLnBrk="0" hangingPunct="1">
+      <a:defRPr sz="1200" kern="1200">
+        <a:solidFill>
+          <a:schemeClr val="tx1"/>
+        </a:solidFill>
+        <a:latin typeface="+mn-lt"/>
+        <a:ea typeface="+mn-ea"/>
+        <a:cs typeface="+mn-cs"/>
+      </a:defRPr>
+    </a:lvl1pPr>
+    <a:lvl2pPr marL="457200" algn="l" defTabSz="914400" rtl="0" eaLnBrk="1" latinLnBrk="0" hangingPunct="1">
+      <a:defRPr sz="1200" kern="1200">
+        <a:solidFill>
+          <a:schemeClr val="tx1"/>
+        </a:solidFill>
+        <a:latin typeface="+mn-lt"/>
+        <a:ea typeface="+mn-ea"/>
+        <a:cs typeface="+mn-cs"/>
+      </a:defRPr>
+    </a:lvl2pPr>
+    <a:lvl3pPr marL="914400" algn="l" defTabSz="914400" rtl="0" eaLnBrk="1" latinLnBrk="0" hangingPunct="1">
+      <a:defRPr sz="1200" kern="1200">
+        <a:solidFill>
+          <a:schemeClr val="tx1"/>
+        </a:solidFill>
+        <a:latin typeface="+mn-lt"/>
+        <a:ea typeface="+mn-ea"/>
+        <a:cs typeface="+mn-cs"/>
+      </a:defRPr>
+    </a:lvl3pPr>
+    <a:lvl4pPr marL="1371600" algn="l" defTabSz="914400" rtl="0" eaLnBrk="1" latinLnBrk="0" hangingPunct="1">
+      <a:defRPr sz="1200" kern="1200">
+        <a:solidFill>
+          <a:schemeClr val="tx1"/>
+        </a:solidFill>
+        <a:latin typeface="+mn-lt"/>
+        <a:ea typeface="+mn-ea"/>
+        <a:cs typeface="+mn-cs"/>
+      </a:defRPr>
+    </a:lvl4pPr>
+    <a:lvl5pPr marL="1828800" algn="l" defTabSz="914400" rtl="0" eaLnBrk="1" latinLnBrk="0" hangingPunct="1">
+      <a:defRPr sz="1200" kern="1200">
+        <a:solidFill>
+          <a:schemeClr val="tx1"/>
+        </a:solidFill>
+        <a:latin typeface="+mn-lt"/>
+        <a:ea typeface="+mn-ea"/>
+        <a:cs typeface="+mn-cs"/>
+      </a:defRPr>
+    </a:lvl5pPr>
+    <a:lvl6pPr marL="2286000" algn="l" defTabSz="914400" rtl="0" eaLnBrk="1" latinLnBrk="0" hangingPunct="1">
+      <a:defRPr sz="1200" kern="1200">
+        <a:solidFill>
+          <a:schemeClr val="tx1"/>
+        </a:solidFill>
+        <a:latin typeface="+mn-lt"/>
+        <a:ea typeface="+mn-ea"/>
+        <a:cs typeface="+mn-cs"/>
+      </a:defRPr>
+    </a:lvl6pPr>
+    <a:lvl7pPr marL="2743200" algn="l" defTabSz="914400" rtl="0" eaLnBrk="1" latinLnBrk="0" hangingPunct="1">
+      <a:defRPr sz="1200" kern="1200">
+        <a:solidFill>
+          <a:schemeClr val="tx1"/>
+        </a:solidFill>
+        <a:latin typeface="+mn-lt"/>
+        <a:ea typeface="+mn-ea"/>
+        <a:cs typeface="+mn-cs"/>
+      </a:defRPr>
+    </a:lvl7pPr>
+    <a:lvl8pPr marL="3200400" algn="l" defTabSz="914400" rtl="0" eaLnBrk="1" latinLnBrk="0" hangingPunct="1">
+      <a:defRPr sz="1200" kern="1200">
+        <a:solidFill>
+          <a:schemeClr val="tx1"/>
+        </a:solidFill>
+        <a:latin typeface="+mn-lt"/>
+        <a:ea typeface="+mn-ea"/>
+        <a:cs typeface="+mn-cs"/>
+      </a:defRPr>
+    </a:lvl8pPr>
+    <a:lvl9pPr marL="3657600" algn="l" defTabSz="914400" rtl="0" eaLnBrk="1" latinLnBrk="0" hangingPunct="1">
+      <a:defRPr sz="1200" kern="1200">
+        <a:solidFill>
+          <a:schemeClr val="tx1"/>
+        </a:solidFill>
+        <a:latin typeface="+mn-lt"/>
+        <a:ea typeface="+mn-ea"/>
+        <a:cs typeface="+mn-cs"/>
+      </a:defRPr>
+    </a:lvl9pPr>
+  </p:notesStyle>
+</p:notesMaster>
+</file>
+
+<file path=ppt/notesSlides/notesSlide1.xml><?xml version="1.0" encoding="utf-8"?>
+<p:notes xmlns:a="http://schemas.openxmlformats.org/drawingml/2006/main" xmlns:r="http://schemas.openxmlformats.org/officeDocument/2006/relationships" xmlns:p="http://schemas.openxmlformats.org/presentationml/2006/main">
+  <p:cSld>
+    <p:spTree>
+      <p:nvGrpSpPr>
+        <p:cNvPr id="1" name=""/>
+        <p:cNvGrpSpPr/>
+        <p:nvPr/>
+      </p:nvGrpSpPr>
+      <p:grpSpPr>
+        <a:xfrm>
+          <a:off x="0" y="0"/>
+          <a:ext cx="0" cy="0"/>
+          <a:chOff x="0" y="0"/>
+          <a:chExt cx="0" cy="0"/>
+        </a:xfrm>
+      </p:grpSpPr>
+      <p:sp>
+        <p:nvSpPr>
+          <p:cNvPr id="2" name="Slide Image Placeholder 1"/>
+          <p:cNvSpPr>
+            <a:spLocks noGrp="1" noRot="1" noChangeAspect="1"/>
+          </p:cNvSpPr>
+          <p:nvPr>
+            <p:ph type="sldImg"/>
+          </p:nvPr>
+        </p:nvSpPr>
+        <p:spPr>
+          <a:xfrm>
+            <a:off x="685800" y="1143000"/>
+            <a:ext cx="5486400" cy="3086100"/>
+          </a:xfrm>
+        </p:spPr>
+      </p:sp>
+      <p:sp>
+        <p:nvSpPr>
+          <p:cNvPr id="3" name="Notes Placeholder 2"/>
+          <p:cNvSpPr>
+            <a:spLocks noGrp="1"/>
+          </p:cNvSpPr>
+          <p:nvPr>
+            <p:ph type="body" idx="1"/>
+          </p:nvPr>
+        </p:nvSpPr>
+        <p:spPr/>
+        <p:txBody>
+          <a:bodyPr/>
+          <a:lstStyle/>
+          <a:p>
+            <a:r>
+              <a:rPr lang="en-US" dirty="0"/>
+              <a:t>Here</a:t>
+            </a:r>
+            <a:r>
+              <a:rPr lang="en-US" baseline="0" dirty="0"/>
+              <a:t> is a note</a:t>
+            </a:r>
+          </a:p>
+          <a:p>
+            <a:endParaRPr lang="en-US" baseline="0" dirty="0"/>
+          </a:p>
+          <a:p>
+            <a:r>
+              <a:rPr lang="en-US" baseline="0" dirty="0"/>
+              <a:t>With another paragraph.</a:t>
+            </a:r>
+            <a:endParaRPr lang="en-US" dirty="0"/>
+          </a:p>
+        </p:txBody>
+      </p:sp>
+      <p:sp>
+        <p:nvSpPr>
+          <p:cNvPr id="4" name="Slide Number Placeholder 3"/>
+          <p:cNvSpPr>
+            <a:spLocks noGrp="1"/>
+          </p:cNvSpPr>
+          <p:nvPr>
+            <p:ph type="sldNum" sz="quarter" idx="10"/>
+          </p:nvPr>
+        </p:nvSpPr>
+        <p:spPr/>
+        <p:txBody>
+          <a:bodyPr/>
+          <a:lstStyle/>
+          <a:p>
+            <a:fld id="{18BDFEC3-8487-43E8-A154-7C12CBC1FFF2}" type="slidenum">
+              <a:rPr lang="en-US" smtClean="0"/>
+              <a:t>1</a:t>
+            </a:fld>
+            <a:endParaRPr lang="en-US"/>
+          </a:p>
+        </p:txBody>
+      </p:sp>
+    </p:spTree>
+    <p:extLst>
+      <p:ext uri="{BB962C8B-B14F-4D97-AF65-F5344CB8AC3E}">
+        <p14:creationId xmlns:p14="http://schemas.microsoft.com/office/powerpoint/2010/main" val="3171319170"/>
+      </p:ext>
+    </p:extLst>
+  </p:cSld>
+  <p:clrMapOvr>
+    <a:masterClrMapping/>
+  </p:clrMapOvr>
+</p:notes>
+</file>
+
+<file path=ppt/notesSlides/notesSlide2.xml><?xml version="1.0" encoding="utf-8"?>
+<p:notes xmlns:a="http://schemas.openxmlformats.org/drawingml/2006/main" xmlns:r="http://schemas.openxmlformats.org/officeDocument/2006/relationships" xmlns:p="http://schemas.openxmlformats.org/presentationml/2006/main">
+  <p:cSld>
+    <p:spTree>
+      <p:nvGrpSpPr>
+        <p:cNvPr id="1" name=""/>
+        <p:cNvGrpSpPr/>
+        <p:nvPr/>
+      </p:nvGrpSpPr>
+      <p:grpSpPr>
+        <a:xfrm>
+          <a:off x="0" y="0"/>
+          <a:ext cx="0" cy="0"/>
+          <a:chOff x="0" y="0"/>
+          <a:chExt cx="0" cy="0"/>
+        </a:xfrm>
+      </p:grpSpPr>
+      <p:sp>
+        <p:nvSpPr>
+          <p:cNvPr id="2" name="Slide Image Placeholder 1"/>
+          <p:cNvSpPr>
+            <a:spLocks noGrp="1" noRot="1" noChangeAspect="1"/>
+          </p:cNvSpPr>
+          <p:nvPr>
+            <p:ph type="sldImg"/>
+          </p:nvPr>
+        </p:nvSpPr>
+        <p:spPr>
+          <a:xfrm>
+            <a:off x="685800" y="1143000"/>
+            <a:ext cx="5486400" cy="3086100"/>
+          </a:xfrm>
+        </p:spPr>
+      </p:sp>
+      <p:sp>
+        <p:nvSpPr>
+          <p:cNvPr id="3" name="Notes Placeholder 2"/>
+          <p:cNvSpPr>
+            <a:spLocks noGrp="1"/>
+          </p:cNvSpPr>
+          <p:nvPr>
+            <p:ph type="body" idx="1"/>
+          </p:nvPr>
+        </p:nvSpPr>
+        <p:spPr/>
+        <p:txBody>
+          <a:bodyPr/>
+          <a:lstStyle/>
+          <a:p>
+            <a:r>
+              <a:rPr lang="en-US" dirty="0"/>
+              <a:t>A</a:t>
+            </a:r>
+            <a:r>
+              <a:rPr lang="en-US" baseline="0" dirty="0"/>
+              <a:t> speaker note on </a:t>
+            </a:r>
+            <a:r>
+              <a:rPr lang="en-US" baseline="0"/>
+              <a:t>this slide too.</a:t>
+            </a:r>
+            <a:endParaRPr lang="en-US"/>
+          </a:p>
+        </p:txBody>
+      </p:sp>
+      <p:sp>
+        <p:nvSpPr>
+          <p:cNvPr id="4" name="Slide Number Placeholder 3"/>
+          <p:cNvSpPr>
+            <a:spLocks noGrp="1"/>
+          </p:cNvSpPr>
+          <p:nvPr>
+            <p:ph type="sldNum" sz="quarter" idx="10"/>
+          </p:nvPr>
+        </p:nvSpPr>
+        <p:spPr/>
+        <p:txBody>
+          <a:bodyPr/>
+          <a:lstStyle/>
+          <a:p>
+            <a:fld id="{18BDFEC3-8487-43E8-A154-7C12CBC1FFF2}" type="slidenum">
+              <a:rPr lang="en-US" smtClean="0"/>
+              <a:t>2</a:t>
+            </a:fld>
+            <a:endParaRPr lang="en-US"/>
+          </a:p>
+        </p:txBody>
+      </p:sp>
+    </p:spTree>
+    <p:extLst>
+      <p:ext uri="{BB962C8B-B14F-4D97-AF65-F5344CB8AC3E}">
+        <p14:creationId xmlns:p14="http://schemas.microsoft.com/office/powerpoint/2010/main" val="3016900036"/>
+      </p:ext>
+    </p:extLst>
+  </p:cSld>
+  <p:clrMapOvr>
+    <a:masterClrMapping/>
+  </p:clrMapOvr>
+</p:notes>
 </file>
 
 <file path=ppt/slideLayouts/slideLayout1.xml><?xml version="1.0" encoding="utf-8"?>
@@ -133,8 +714,8 @@
         </p:nvSpPr>
         <p:spPr>
           <a:xfrm>
-            <a:off x="685800" y="2130425"/>
-            <a:ext cx="7772400" cy="1470025"/>
+            <a:off x="685800" y="1597819"/>
+            <a:ext cx="7772400" cy="1102519"/>
           </a:xfrm>
         </p:spPr>
         <p:txBody>
@@ -142,14 +723,13 @@
           <a:lstStyle/>
           <a:p>
             <a:r>
-              <a:rPr lang="en-US" smtClean="0">
+              <a:rPr lang="en-US">
                 <a:solidFill>
                   <a:srgbClr val="111111"/>
                 </a:solidFill>
               </a:rPr>
               <a:t>Click to edit Master title style</a:t>
             </a:r>
-            <a:endParaRPr lang="en-US"/>
           </a:p>
         </p:txBody>
       </p:sp>
@@ -165,8 +745,8 @@
         </p:nvSpPr>
         <p:spPr>
           <a:xfrm>
-            <a:off x="1371600" y="3886200"/>
-            <a:ext cx="6400800" cy="1752600"/>
+            <a:off x="1371600" y="2914650"/>
+            <a:ext cx="6400800" cy="1314450"/>
           </a:xfrm>
         </p:spPr>
         <p:txBody>
@@ -180,7 +760,7 @@
                 </a:solidFill>
               </a:defRPr>
             </a:lvl1pPr>
-            <a:lvl2pPr marL="457200" indent="0" algn="ctr">
+            <a:lvl2pPr marL="342900" indent="0" algn="ctr">
               <a:buNone/>
               <a:defRPr>
                 <a:solidFill>
@@ -188,7 +768,7 @@
                 </a:solidFill>
               </a:defRPr>
             </a:lvl2pPr>
-            <a:lvl3pPr marL="914400" indent="0" algn="ctr">
+            <a:lvl3pPr marL="685800" indent="0" algn="ctr">
               <a:buNone/>
               <a:defRPr>
                 <a:solidFill>
@@ -196,7 +776,7 @@
                 </a:solidFill>
               </a:defRPr>
             </a:lvl3pPr>
-            <a:lvl4pPr marL="1371600" indent="0" algn="ctr">
+            <a:lvl4pPr marL="1028700" indent="0" algn="ctr">
               <a:buNone/>
               <a:defRPr>
                 <a:solidFill>
@@ -204,7 +784,7 @@
                 </a:solidFill>
               </a:defRPr>
             </a:lvl4pPr>
-            <a:lvl5pPr marL="1828800" indent="0" algn="ctr">
+            <a:lvl5pPr marL="1371600" indent="0" algn="ctr">
               <a:buNone/>
               <a:defRPr>
                 <a:solidFill>
@@ -212,7 +792,7 @@
                 </a:solidFill>
               </a:defRPr>
             </a:lvl5pPr>
-            <a:lvl6pPr marL="2286000" indent="0" algn="ctr">
+            <a:lvl6pPr marL="1714500" indent="0" algn="ctr">
               <a:buNone/>
               <a:defRPr>
                 <a:solidFill>
@@ -220,7 +800,7 @@
                 </a:solidFill>
               </a:defRPr>
             </a:lvl6pPr>
-            <a:lvl7pPr marL="2743200" indent="0" algn="ctr">
+            <a:lvl7pPr marL="2057400" indent="0" algn="ctr">
               <a:buNone/>
               <a:defRPr>
                 <a:solidFill>
@@ -228,7 +808,7 @@
                 </a:solidFill>
               </a:defRPr>
             </a:lvl7pPr>
-            <a:lvl8pPr marL="3200400" indent="0" algn="ctr">
+            <a:lvl8pPr marL="2400300" indent="0" algn="ctr">
               <a:buNone/>
               <a:defRPr>
                 <a:solidFill>
@@ -236,7 +816,7 @@
                 </a:solidFill>
               </a:defRPr>
             </a:lvl8pPr>
-            <a:lvl9pPr marL="3657600" indent="0" algn="ctr">
+            <a:lvl9pPr marL="2743200" indent="0" algn="ctr">
               <a:buNone/>
               <a:defRPr>
                 <a:solidFill>
@@ -247,25 +827,55 @@
           </a:lstStyle>
           <a:p>
             <a:r>
+              <a:rPr lang="en-US">
+                <a:solidFill>
+                  <a:srgbClr val="111111"/>
+                </a:solidFill>
+              </a:rPr>
+              <a:t>Click to edit Master subtitle style</a:t>
+            </a:r>
+          </a:p>
+        </p:txBody>
+      </p:sp>
+      <p:sp>
+        <p:nvSpPr>
+          <p:cNvPr id="4" name="Date Placeholder 3"/>
+          <p:cNvSpPr>
+            <a:spLocks noGrp="1"/>
+          </p:cNvSpPr>
+          <p:nvPr>
+            <p:ph type="dt" sz="half" idx="10"/>
+          </p:nvPr>
+        </p:nvSpPr>
+        <p:spPr/>
+        <p:txBody>
+          <a:bodyPr/>
+          <a:lstStyle/>
+          <a:p>
+            <a:fld id="{241EB5C9-1307-BA42-ABA2-0BC069CD8E7F}" type="datetimeFigureOut">
               <a:rPr lang="en-US" smtClean="0">
                 <a:solidFill>
                   <a:srgbClr val="111111"/>
                 </a:solidFill>
               </a:rPr>
-              <a:t>Click to edit Master subtitle style</a:t>
-            </a:r>
-            <a:endParaRPr lang="en-US"/>
-          </a:p>
-        </p:txBody>
-      </p:sp>
-      <p:sp>
-        <p:nvSpPr>
-          <p:cNvPr id="4" name="Date Placeholder 3"/>
-          <p:cNvSpPr>
-            <a:spLocks noGrp="1"/>
-          </p:cNvSpPr>
-          <p:nvPr>
-            <p:ph type="dt" sz="half" idx="10"/>
+              <a:t>1/2/22</a:t>
+            </a:fld>
+            <a:endParaRPr lang="en-US">
+              <a:solidFill>
+                <a:srgbClr val="111111"/>
+              </a:solidFill>
+            </a:endParaRPr>
+          </a:p>
+        </p:txBody>
+      </p:sp>
+      <p:sp>
+        <p:nvSpPr>
+          <p:cNvPr id="5" name="Footer Placeholder 4"/>
+          <p:cNvSpPr>
+            <a:spLocks noGrp="1"/>
+          </p:cNvSpPr>
+          <p:nvPr>
+            <p:ph type="ftr" sz="quarter" idx="11"/>
           </p:nvPr>
         </p:nvSpPr>
         <p:spPr/>
@@ -273,26 +883,22 @@
           <a:bodyPr/>
           <a:lstStyle/>
           <a:p>
-            <a:fld id="{5BCAD085-E8A6-8845-BD4E-CB4CCA059FC4}" type="datetimeFigureOut">
-              <a:rPr lang="en-US" smtClean="0">
-                <a:solidFill>
-                  <a:srgbClr val="111111"/>
-                </a:solidFill>
-              </a:rPr>
-              <a:t>1/27/13</a:t>
-            </a:fld>
-            <a:endParaRPr lang="en-US"/>
-          </a:p>
-        </p:txBody>
-      </p:sp>
-      <p:sp>
-        <p:nvSpPr>
-          <p:cNvPr id="5" name="Footer Placeholder 4"/>
-          <p:cNvSpPr>
-            <a:spLocks noGrp="1"/>
-          </p:cNvSpPr>
-          <p:nvPr>
-            <p:ph type="ftr" sz="quarter" idx="11"/>
+            <a:endParaRPr lang="en-US">
+              <a:solidFill>
+                <a:srgbClr val="111111"/>
+              </a:solidFill>
+            </a:endParaRPr>
+          </a:p>
+        </p:txBody>
+      </p:sp>
+      <p:sp>
+        <p:nvSpPr>
+          <p:cNvPr id="6" name="Slide Number Placeholder 5"/>
+          <p:cNvSpPr>
+            <a:spLocks noGrp="1"/>
+          </p:cNvSpPr>
+          <p:nvPr>
+            <p:ph type="sldNum" sz="quarter" idx="12"/>
           </p:nvPr>
         </p:nvSpPr>
         <p:spPr/>
@@ -300,26 +906,7 @@
           <a:bodyPr/>
           <a:lstStyle/>
           <a:p>
-            <a:endParaRPr lang="en-US"/>
-          </a:p>
-        </p:txBody>
-      </p:sp>
-      <p:sp>
-        <p:nvSpPr>
-          <p:cNvPr id="6" name="Slide Number Placeholder 5"/>
-          <p:cNvSpPr>
-            <a:spLocks noGrp="1"/>
-          </p:cNvSpPr>
-          <p:nvPr>
-            <p:ph type="sldNum" sz="quarter" idx="12"/>
-          </p:nvPr>
-        </p:nvSpPr>
-        <p:spPr/>
-        <p:txBody>
-          <a:bodyPr/>
-          <a:lstStyle/>
-          <a:p>
-            <a:fld id="{C1FF6DA9-008F-8B48-92A6-B652298478BF}" type="slidenum">
+            <a:fld id="{C5EF2332-01BF-834F-8236-50238282D533}" type="slidenum">
               <a:rPr lang="en-US" smtClean="0">
                 <a:solidFill>
                   <a:srgbClr val="111111"/>
@@ -327,14 +914,18 @@
               </a:rPr>
               <a:t>‹#›</a:t>
             </a:fld>
-            <a:endParaRPr lang="en-US"/>
+            <a:endParaRPr lang="en-US">
+              <a:solidFill>
+                <a:srgbClr val="111111"/>
+              </a:solidFill>
+            </a:endParaRPr>
           </a:p>
         </p:txBody>
       </p:sp>
     </p:spTree>
     <p:extLst>
       <p:ext uri="{BB962C8B-B14F-4D97-AF65-F5344CB8AC3E}">
-        <p14:creationId xmlns:p14="http://schemas.microsoft.com/office/powerpoint/2010/main" val="3168075583"/>
+        <p14:creationId xmlns:p14="http://schemas.microsoft.com/office/powerpoint/2010/main" val="1444357513"/>
       </p:ext>
     </p:extLst>
   </p:cSld>
@@ -377,97 +968,149 @@
           <a:lstStyle/>
           <a:p>
             <a:r>
+              <a:rPr lang="en-US">
+                <a:solidFill>
+                  <a:srgbClr val="111111"/>
+                </a:solidFill>
+              </a:rPr>
+              <a:t>Click to edit Master title style</a:t>
+            </a:r>
+          </a:p>
+        </p:txBody>
+      </p:sp>
+      <p:sp>
+        <p:nvSpPr>
+          <p:cNvPr id="3" name="Vertical Text Placeholder 2"/>
+          <p:cNvSpPr>
+            <a:spLocks noGrp="1"/>
+          </p:cNvSpPr>
+          <p:nvPr>
+            <p:ph type="body" orient="vert" idx="1"/>
+          </p:nvPr>
+        </p:nvSpPr>
+        <p:spPr/>
+        <p:txBody>
+          <a:bodyPr vert="eaVert"/>
+          <a:lstStyle/>
+          <a:p>
+            <a:pPr lvl="0"/>
+            <a:r>
+              <a:rPr lang="en-US">
+                <a:solidFill>
+                  <a:srgbClr val="111111"/>
+                </a:solidFill>
+              </a:rPr>
+              <a:t>Click to edit Master text styles</a:t>
+            </a:r>
+          </a:p>
+          <a:p>
+            <a:pPr lvl="1"/>
+            <a:r>
+              <a:rPr lang="en-US">
+                <a:solidFill>
+                  <a:srgbClr val="111111"/>
+                </a:solidFill>
+              </a:rPr>
+              <a:t>Second level</a:t>
+            </a:r>
+          </a:p>
+          <a:p>
+            <a:pPr lvl="2"/>
+            <a:r>
+              <a:rPr lang="en-US">
+                <a:solidFill>
+                  <a:srgbClr val="111111"/>
+                </a:solidFill>
+              </a:rPr>
+              <a:t>Third level</a:t>
+            </a:r>
+          </a:p>
+          <a:p>
+            <a:pPr lvl="3"/>
+            <a:r>
+              <a:rPr lang="en-US">
+                <a:solidFill>
+                  <a:srgbClr val="111111"/>
+                </a:solidFill>
+              </a:rPr>
+              <a:t>Fourth level</a:t>
+            </a:r>
+          </a:p>
+          <a:p>
+            <a:pPr lvl="4"/>
+            <a:r>
+              <a:rPr lang="en-US">
+                <a:solidFill>
+                  <a:srgbClr val="111111"/>
+                </a:solidFill>
+              </a:rPr>
+              <a:t>Fifth level</a:t>
+            </a:r>
+          </a:p>
+        </p:txBody>
+      </p:sp>
+      <p:sp>
+        <p:nvSpPr>
+          <p:cNvPr id="4" name="Date Placeholder 3"/>
+          <p:cNvSpPr>
+            <a:spLocks noGrp="1"/>
+          </p:cNvSpPr>
+          <p:nvPr>
+            <p:ph type="dt" sz="half" idx="10"/>
+          </p:nvPr>
+        </p:nvSpPr>
+        <p:spPr/>
+        <p:txBody>
+          <a:bodyPr/>
+          <a:lstStyle/>
+          <a:p>
+            <a:fld id="{241EB5C9-1307-BA42-ABA2-0BC069CD8E7F}" type="datetimeFigureOut">
               <a:rPr lang="en-US" smtClean="0">
                 <a:solidFill>
                   <a:srgbClr val="111111"/>
                 </a:solidFill>
               </a:rPr>
-              <a:t>Click to edit Master title style</a:t>
-            </a:r>
-            <a:endParaRPr lang="en-US"/>
-          </a:p>
-        </p:txBody>
-      </p:sp>
-      <p:sp>
-        <p:nvSpPr>
-          <p:cNvPr id="3" name="Vertical Text Placeholder 2"/>
-          <p:cNvSpPr>
-            <a:spLocks noGrp="1"/>
-          </p:cNvSpPr>
-          <p:nvPr>
-            <p:ph type="body" orient="vert" idx="1"/>
+              <a:t>1/2/22</a:t>
+            </a:fld>
+            <a:endParaRPr lang="en-US">
+              <a:solidFill>
+                <a:srgbClr val="111111"/>
+              </a:solidFill>
+            </a:endParaRPr>
+          </a:p>
+        </p:txBody>
+      </p:sp>
+      <p:sp>
+        <p:nvSpPr>
+          <p:cNvPr id="5" name="Footer Placeholder 4"/>
+          <p:cNvSpPr>
+            <a:spLocks noGrp="1"/>
+          </p:cNvSpPr>
+          <p:nvPr>
+            <p:ph type="ftr" sz="quarter" idx="11"/>
           </p:nvPr>
         </p:nvSpPr>
         <p:spPr/>
         <p:txBody>
-          <a:bodyPr vert="eaVert"/>
-          <a:lstStyle/>
-          <a:p>
-            <a:pPr lvl="0"/>
-            <a:r>
-              <a:rPr lang="en-US" smtClean="0">
-                <a:solidFill>
-                  <a:srgbClr val="111111"/>
-                </a:solidFill>
-              </a:rPr>
-              <a:t>Click to edit Master text styles</a:t>
-            </a:r>
-          </a:p>
-          <a:p>
-            <a:pPr lvl="1"/>
-            <a:r>
-              <a:rPr lang="en-US" smtClean="0">
-                <a:solidFill>
-                  <a:srgbClr val="111111"/>
-                </a:solidFill>
-              </a:rPr>
-              <a:t>Second level</a:t>
-            </a:r>
-          </a:p>
-          <a:p>
-            <a:pPr lvl="2"/>
-            <a:r>
-              <a:rPr lang="en-US" smtClean="0">
-                <a:solidFill>
-                  <a:srgbClr val="111111"/>
-                </a:solidFill>
-              </a:rPr>
-              <a:t>Third level</a:t>
-            </a:r>
-          </a:p>
-          <a:p>
-            <a:pPr lvl="3"/>
-            <a:r>
-              <a:rPr lang="en-US" smtClean="0">
-                <a:solidFill>
-                  <a:srgbClr val="111111"/>
-                </a:solidFill>
-              </a:rPr>
-              <a:t>Fourth level</a:t>
-            </a:r>
-          </a:p>
-          <a:p>
-            <a:pPr lvl="4"/>
-            <a:r>
-              <a:rPr lang="en-US" smtClean="0">
-                <a:solidFill>
-                  <a:srgbClr val="111111"/>
-                </a:solidFill>
-              </a:rPr>
-              <a:t>Fifth level</a:t>
-            </a:r>
-            <a:endParaRPr lang="en-US"/>
-          </a:p>
-        </p:txBody>
-      </p:sp>
-      <p:sp>
-        <p:nvSpPr>
-          <p:cNvPr id="4" name="Date Placeholder 3"/>
-          <p:cNvSpPr>
-            <a:spLocks noGrp="1"/>
-          </p:cNvSpPr>
-          <p:nvPr>
-            <p:ph type="dt" sz="half" idx="10"/>
+          <a:bodyPr/>
+          <a:lstStyle/>
+          <a:p>
+            <a:endParaRPr lang="en-US">
+              <a:solidFill>
+                <a:srgbClr val="111111"/>
+              </a:solidFill>
+            </a:endParaRPr>
+          </a:p>
+        </p:txBody>
+      </p:sp>
+      <p:sp>
+        <p:nvSpPr>
+          <p:cNvPr id="6" name="Slide Number Placeholder 5"/>
+          <p:cNvSpPr>
+            <a:spLocks noGrp="1"/>
+          </p:cNvSpPr>
+          <p:nvPr>
+            <p:ph type="sldNum" sz="quarter" idx="12"/>
           </p:nvPr>
         </p:nvSpPr>
         <p:spPr/>
@@ -475,53 +1118,7 @@
           <a:bodyPr/>
           <a:lstStyle/>
           <a:p>
-            <a:fld id="{5BCAD085-E8A6-8845-BD4E-CB4CCA059FC4}" type="datetimeFigureOut">
-              <a:rPr lang="en-US" smtClean="0">
-                <a:solidFill>
-                  <a:srgbClr val="111111"/>
-                </a:solidFill>
-              </a:rPr>
-              <a:t>1/27/13</a:t>
-            </a:fld>
-            <a:endParaRPr lang="en-US"/>
-          </a:p>
-        </p:txBody>
-      </p:sp>
-      <p:sp>
-        <p:nvSpPr>
-          <p:cNvPr id="5" name="Footer Placeholder 4"/>
-          <p:cNvSpPr>
-            <a:spLocks noGrp="1"/>
-          </p:cNvSpPr>
-          <p:nvPr>
-            <p:ph type="ftr" sz="quarter" idx="11"/>
-          </p:nvPr>
-        </p:nvSpPr>
-        <p:spPr/>
-        <p:txBody>
-          <a:bodyPr/>
-          <a:lstStyle/>
-          <a:p>
-            <a:endParaRPr lang="en-US"/>
-          </a:p>
-        </p:txBody>
-      </p:sp>
-      <p:sp>
-        <p:nvSpPr>
-          <p:cNvPr id="6" name="Slide Number Placeholder 5"/>
-          <p:cNvSpPr>
-            <a:spLocks noGrp="1"/>
-          </p:cNvSpPr>
-          <p:nvPr>
-            <p:ph type="sldNum" sz="quarter" idx="12"/>
-          </p:nvPr>
-        </p:nvSpPr>
-        <p:spPr/>
-        <p:txBody>
-          <a:bodyPr/>
-          <a:lstStyle/>
-          <a:p>
-            <a:fld id="{C1FF6DA9-008F-8B48-92A6-B652298478BF}" type="slidenum">
+            <a:fld id="{C5EF2332-01BF-834F-8236-50238282D533}" type="slidenum">
               <a:rPr lang="en-US" smtClean="0">
                 <a:solidFill>
                   <a:srgbClr val="111111"/>
@@ -529,14 +1126,18 @@
               </a:rPr>
               <a:t>‹#›</a:t>
             </a:fld>
-            <a:endParaRPr lang="en-US"/>
+            <a:endParaRPr lang="en-US">
+              <a:solidFill>
+                <a:srgbClr val="111111"/>
+              </a:solidFill>
+            </a:endParaRPr>
           </a:p>
         </p:txBody>
       </p:sp>
     </p:spTree>
     <p:extLst>
       <p:ext uri="{BB962C8B-B14F-4D97-AF65-F5344CB8AC3E}">
-        <p14:creationId xmlns:p14="http://schemas.microsoft.com/office/powerpoint/2010/main" val="2910927964"/>
+        <p14:creationId xmlns:p14="http://schemas.microsoft.com/office/powerpoint/2010/main" val="313914798"/>
       </p:ext>
     </p:extLst>
   </p:cSld>
@@ -575,8 +1176,8 @@
         </p:nvSpPr>
         <p:spPr>
           <a:xfrm>
-            <a:off x="6629400" y="274638"/>
-            <a:ext cx="2057400" cy="5851525"/>
+            <a:off x="6629400" y="205979"/>
+            <a:ext cx="2057400" cy="4388644"/>
           </a:xfrm>
         </p:spPr>
         <p:txBody>
@@ -584,14 +1185,13 @@
           <a:lstStyle/>
           <a:p>
             <a:r>
-              <a:rPr lang="en-US" smtClean="0">
+              <a:rPr lang="en-US">
                 <a:solidFill>
                   <a:srgbClr val="111111"/>
                 </a:solidFill>
               </a:rPr>
               <a:t>Click to edit Master title style</a:t>
             </a:r>
-            <a:endParaRPr lang="en-US"/>
           </a:p>
         </p:txBody>
       </p:sp>
@@ -607,8 +1207,8 @@
         </p:nvSpPr>
         <p:spPr>
           <a:xfrm>
-            <a:off x="457200" y="274638"/>
-            <a:ext cx="6019800" cy="5851525"/>
+            <a:off x="457200" y="205979"/>
+            <a:ext cx="6019800" cy="4388644"/>
           </a:xfrm>
         </p:spPr>
         <p:txBody>
@@ -617,69 +1217,99 @@
           <a:p>
             <a:pPr lvl="0"/>
             <a:r>
+              <a:rPr lang="en-US">
+                <a:solidFill>
+                  <a:srgbClr val="111111"/>
+                </a:solidFill>
+              </a:rPr>
+              <a:t>Click to edit Master text styles</a:t>
+            </a:r>
+          </a:p>
+          <a:p>
+            <a:pPr lvl="1"/>
+            <a:r>
+              <a:rPr lang="en-US">
+                <a:solidFill>
+                  <a:srgbClr val="111111"/>
+                </a:solidFill>
+              </a:rPr>
+              <a:t>Second level</a:t>
+            </a:r>
+          </a:p>
+          <a:p>
+            <a:pPr lvl="2"/>
+            <a:r>
+              <a:rPr lang="en-US">
+                <a:solidFill>
+                  <a:srgbClr val="111111"/>
+                </a:solidFill>
+              </a:rPr>
+              <a:t>Third level</a:t>
+            </a:r>
+          </a:p>
+          <a:p>
+            <a:pPr lvl="3"/>
+            <a:r>
+              <a:rPr lang="en-US">
+                <a:solidFill>
+                  <a:srgbClr val="111111"/>
+                </a:solidFill>
+              </a:rPr>
+              <a:t>Fourth level</a:t>
+            </a:r>
+          </a:p>
+          <a:p>
+            <a:pPr lvl="4"/>
+            <a:r>
+              <a:rPr lang="en-US">
+                <a:solidFill>
+                  <a:srgbClr val="111111"/>
+                </a:solidFill>
+              </a:rPr>
+              <a:t>Fifth level</a:t>
+            </a:r>
+          </a:p>
+        </p:txBody>
+      </p:sp>
+      <p:sp>
+        <p:nvSpPr>
+          <p:cNvPr id="4" name="Date Placeholder 3"/>
+          <p:cNvSpPr>
+            <a:spLocks noGrp="1"/>
+          </p:cNvSpPr>
+          <p:nvPr>
+            <p:ph type="dt" sz="half" idx="10"/>
+          </p:nvPr>
+        </p:nvSpPr>
+        <p:spPr/>
+        <p:txBody>
+          <a:bodyPr/>
+          <a:lstStyle/>
+          <a:p>
+            <a:fld id="{241EB5C9-1307-BA42-ABA2-0BC069CD8E7F}" type="datetimeFigureOut">
               <a:rPr lang="en-US" smtClean="0">
                 <a:solidFill>
                   <a:srgbClr val="111111"/>
                 </a:solidFill>
               </a:rPr>
-              <a:t>Click to edit Master text styles</a:t>
-            </a:r>
-          </a:p>
-          <a:p>
-            <a:pPr lvl="1"/>
-            <a:r>
-              <a:rPr lang="en-US" smtClean="0">
-                <a:solidFill>
-                  <a:srgbClr val="111111"/>
-                </a:solidFill>
-              </a:rPr>
-              <a:t>Second level</a:t>
-            </a:r>
-          </a:p>
-          <a:p>
-            <a:pPr lvl="2"/>
-            <a:r>
-              <a:rPr lang="en-US" smtClean="0">
-                <a:solidFill>
-                  <a:srgbClr val="111111"/>
-                </a:solidFill>
-              </a:rPr>
-              <a:t>Third level</a:t>
-            </a:r>
-          </a:p>
-          <a:p>
-            <a:pPr lvl="3"/>
-            <a:r>
-              <a:rPr lang="en-US" smtClean="0">
-                <a:solidFill>
-                  <a:srgbClr val="111111"/>
-                </a:solidFill>
-              </a:rPr>
-              <a:t>Fourth level</a:t>
-            </a:r>
-          </a:p>
-          <a:p>
-            <a:pPr lvl="4"/>
-            <a:r>
-              <a:rPr lang="en-US" smtClean="0">
-                <a:solidFill>
-                  <a:srgbClr val="111111"/>
-                </a:solidFill>
-              </a:rPr>
-              <a:t>Fifth level</a:t>
-            </a:r>
-            <a:endParaRPr lang="en-US"/>
-          </a:p>
-        </p:txBody>
-      </p:sp>
-      <p:sp>
-        <p:nvSpPr>
-          <p:cNvPr id="4" name="Date Placeholder 3"/>
-          <p:cNvSpPr>
-            <a:spLocks noGrp="1"/>
-          </p:cNvSpPr>
-          <p:nvPr>
-            <p:ph type="dt" sz="half" idx="10"/>
+              <a:t>1/2/22</a:t>
+            </a:fld>
+            <a:endParaRPr lang="en-US">
+              <a:solidFill>
+                <a:srgbClr val="111111"/>
+              </a:solidFill>
+            </a:endParaRPr>
+          </a:p>
+        </p:txBody>
+      </p:sp>
+      <p:sp>
+        <p:nvSpPr>
+          <p:cNvPr id="5" name="Footer Placeholder 4"/>
+          <p:cNvSpPr>
+            <a:spLocks noGrp="1"/>
+          </p:cNvSpPr>
+          <p:nvPr>
+            <p:ph type="ftr" sz="quarter" idx="11"/>
           </p:nvPr>
         </p:nvSpPr>
         <p:spPr/>
@@ -687,26 +1317,22 @@
           <a:bodyPr/>
           <a:lstStyle/>
           <a:p>
-            <a:fld id="{5BCAD085-E8A6-8845-BD4E-CB4CCA059FC4}" type="datetimeFigureOut">
-              <a:rPr lang="en-US" smtClean="0">
-                <a:solidFill>
-                  <a:srgbClr val="111111"/>
-                </a:solidFill>
-              </a:rPr>
-              <a:t>1/27/13</a:t>
-            </a:fld>
-            <a:endParaRPr lang="en-US"/>
-          </a:p>
-        </p:txBody>
-      </p:sp>
-      <p:sp>
-        <p:nvSpPr>
-          <p:cNvPr id="5" name="Footer Placeholder 4"/>
-          <p:cNvSpPr>
-            <a:spLocks noGrp="1"/>
-          </p:cNvSpPr>
-          <p:nvPr>
-            <p:ph type="ftr" sz="quarter" idx="11"/>
+            <a:endParaRPr lang="en-US">
+              <a:solidFill>
+                <a:srgbClr val="111111"/>
+              </a:solidFill>
+            </a:endParaRPr>
+          </a:p>
+        </p:txBody>
+      </p:sp>
+      <p:sp>
+        <p:nvSpPr>
+          <p:cNvPr id="6" name="Slide Number Placeholder 5"/>
+          <p:cNvSpPr>
+            <a:spLocks noGrp="1"/>
+          </p:cNvSpPr>
+          <p:nvPr>
+            <p:ph type="sldNum" sz="quarter" idx="12"/>
           </p:nvPr>
         </p:nvSpPr>
         <p:spPr/>
@@ -714,26 +1340,7 @@
           <a:bodyPr/>
           <a:lstStyle/>
           <a:p>
-            <a:endParaRPr lang="en-US"/>
-          </a:p>
-        </p:txBody>
-      </p:sp>
-      <p:sp>
-        <p:nvSpPr>
-          <p:cNvPr id="6" name="Slide Number Placeholder 5"/>
-          <p:cNvSpPr>
-            <a:spLocks noGrp="1"/>
-          </p:cNvSpPr>
-          <p:nvPr>
-            <p:ph type="sldNum" sz="quarter" idx="12"/>
-          </p:nvPr>
-        </p:nvSpPr>
-        <p:spPr/>
-        <p:txBody>
-          <a:bodyPr/>
-          <a:lstStyle/>
-          <a:p>
-            <a:fld id="{C1FF6DA9-008F-8B48-92A6-B652298478BF}" type="slidenum">
+            <a:fld id="{C5EF2332-01BF-834F-8236-50238282D533}" type="slidenum">
               <a:rPr lang="en-US" smtClean="0">
                 <a:solidFill>
                   <a:srgbClr val="111111"/>
@@ -741,14 +1348,18 @@
               </a:rPr>
               <a:t>‹#›</a:t>
             </a:fld>
-            <a:endParaRPr lang="en-US"/>
+            <a:endParaRPr lang="en-US">
+              <a:solidFill>
+                <a:srgbClr val="111111"/>
+              </a:solidFill>
+            </a:endParaRPr>
           </a:p>
         </p:txBody>
       </p:sp>
     </p:spTree>
     <p:extLst>
       <p:ext uri="{BB962C8B-B14F-4D97-AF65-F5344CB8AC3E}">
-        <p14:creationId xmlns:p14="http://schemas.microsoft.com/office/powerpoint/2010/main" val="3612223792"/>
+        <p14:creationId xmlns:p14="http://schemas.microsoft.com/office/powerpoint/2010/main" val="2581529045"/>
       </p:ext>
     </p:extLst>
   </p:cSld>
@@ -791,25 +1402,126 @@
           <a:lstStyle/>
           <a:p>
             <a:r>
+              <a:rPr lang="en-US">
+                <a:solidFill>
+                  <a:srgbClr val="111111"/>
+                </a:solidFill>
+              </a:rPr>
+              <a:t>Click to edit Master title style</a:t>
+            </a:r>
+          </a:p>
+        </p:txBody>
+      </p:sp>
+      <p:sp>
+        <p:nvSpPr>
+          <p:cNvPr id="3" name="Content Placeholder 2"/>
+          <p:cNvSpPr>
+            <a:spLocks noGrp="1"/>
+          </p:cNvSpPr>
+          <p:nvPr>
+            <p:ph idx="1"/>
+          </p:nvPr>
+        </p:nvSpPr>
+        <p:spPr/>
+        <p:txBody>
+          <a:bodyPr/>
+          <a:lstStyle/>
+          <a:p>
+            <a:pPr lvl="0"/>
+            <a:r>
+              <a:rPr lang="en-US">
+                <a:solidFill>
+                  <a:srgbClr val="111111"/>
+                </a:solidFill>
+              </a:rPr>
+              <a:t>Click to edit Master text styles</a:t>
+            </a:r>
+          </a:p>
+          <a:p>
+            <a:pPr lvl="1"/>
+            <a:r>
+              <a:rPr lang="en-US">
+                <a:solidFill>
+                  <a:srgbClr val="111111"/>
+                </a:solidFill>
+              </a:rPr>
+              <a:t>Second level</a:t>
+            </a:r>
+          </a:p>
+          <a:p>
+            <a:pPr lvl="2"/>
+            <a:r>
+              <a:rPr lang="en-US">
+                <a:solidFill>
+                  <a:srgbClr val="111111"/>
+                </a:solidFill>
+              </a:rPr>
+              <a:t>Third level</a:t>
+            </a:r>
+          </a:p>
+          <a:p>
+            <a:pPr lvl="3"/>
+            <a:r>
+              <a:rPr lang="en-US">
+                <a:solidFill>
+                  <a:srgbClr val="111111"/>
+                </a:solidFill>
+              </a:rPr>
+              <a:t>Fourth level</a:t>
+            </a:r>
+          </a:p>
+          <a:p>
+            <a:pPr lvl="4"/>
+            <a:r>
+              <a:rPr lang="en-US">
+                <a:solidFill>
+                  <a:srgbClr val="111111"/>
+                </a:solidFill>
+              </a:rPr>
+              <a:t>Fifth level</a:t>
+            </a:r>
+          </a:p>
+        </p:txBody>
+      </p:sp>
+      <p:sp>
+        <p:nvSpPr>
+          <p:cNvPr id="4" name="Date Placeholder 3"/>
+          <p:cNvSpPr>
+            <a:spLocks noGrp="1"/>
+          </p:cNvSpPr>
+          <p:nvPr>
+            <p:ph type="dt" sz="half" idx="10"/>
+          </p:nvPr>
+        </p:nvSpPr>
+        <p:spPr/>
+        <p:txBody>
+          <a:bodyPr/>
+          <a:lstStyle/>
+          <a:p>
+            <a:fld id="{241EB5C9-1307-BA42-ABA2-0BC069CD8E7F}" type="datetimeFigureOut">
               <a:rPr lang="en-US" smtClean="0">
                 <a:solidFill>
                   <a:srgbClr val="111111"/>
                 </a:solidFill>
               </a:rPr>
-              <a:t>Click to edit Master title style</a:t>
-            </a:r>
-            <a:endParaRPr lang="en-US"/>
-          </a:p>
-        </p:txBody>
-      </p:sp>
-      <p:sp>
-        <p:nvSpPr>
-          <p:cNvPr id="3" name="Content Placeholder 2"/>
-          <p:cNvSpPr>
-            <a:spLocks noGrp="1"/>
-          </p:cNvSpPr>
-          <p:nvPr>
-            <p:ph idx="1"/>
+              <a:t>1/2/22</a:t>
+            </a:fld>
+            <a:endParaRPr lang="en-US">
+              <a:solidFill>
+                <a:srgbClr val="111111"/>
+              </a:solidFill>
+            </a:endParaRPr>
+          </a:p>
+        </p:txBody>
+      </p:sp>
+      <p:sp>
+        <p:nvSpPr>
+          <p:cNvPr id="5" name="Footer Placeholder 4"/>
+          <p:cNvSpPr>
+            <a:spLocks noGrp="1"/>
+          </p:cNvSpPr>
+          <p:nvPr>
+            <p:ph type="ftr" sz="quarter" idx="11"/>
           </p:nvPr>
         </p:nvSpPr>
         <p:spPr/>
@@ -817,71 +1529,22 @@
           <a:bodyPr/>
           <a:lstStyle/>
           <a:p>
-            <a:pPr lvl="0"/>
-            <a:r>
-              <a:rPr lang="en-US" smtClean="0">
-                <a:solidFill>
-                  <a:srgbClr val="111111"/>
-                </a:solidFill>
-              </a:rPr>
-              <a:t>Click to edit Master text styles</a:t>
-            </a:r>
-          </a:p>
-          <a:p>
-            <a:pPr lvl="1"/>
-            <a:r>
-              <a:rPr lang="en-US" smtClean="0">
-                <a:solidFill>
-                  <a:srgbClr val="111111"/>
-                </a:solidFill>
-              </a:rPr>
-              <a:t>Second level</a:t>
-            </a:r>
-          </a:p>
-          <a:p>
-            <a:pPr lvl="2"/>
-            <a:r>
-              <a:rPr lang="en-US" smtClean="0">
-                <a:solidFill>
-                  <a:srgbClr val="111111"/>
-                </a:solidFill>
-              </a:rPr>
-              <a:t>Third level</a:t>
-            </a:r>
-          </a:p>
-          <a:p>
-            <a:pPr lvl="3"/>
-            <a:r>
-              <a:rPr lang="en-US" smtClean="0">
-                <a:solidFill>
-                  <a:srgbClr val="111111"/>
-                </a:solidFill>
-              </a:rPr>
-              <a:t>Fourth level</a:t>
-            </a:r>
-          </a:p>
-          <a:p>
-            <a:pPr lvl="4"/>
-            <a:r>
-              <a:rPr lang="en-US" smtClean="0">
-                <a:solidFill>
-                  <a:srgbClr val="111111"/>
-                </a:solidFill>
-              </a:rPr>
-              <a:t>Fifth level</a:t>
-            </a:r>
-            <a:endParaRPr lang="en-US"/>
-          </a:p>
-        </p:txBody>
-      </p:sp>
-      <p:sp>
-        <p:nvSpPr>
-          <p:cNvPr id="4" name="Date Placeholder 3"/>
-          <p:cNvSpPr>
-            <a:spLocks noGrp="1"/>
-          </p:cNvSpPr>
-          <p:nvPr>
-            <p:ph type="dt" sz="half" idx="10"/>
+            <a:endParaRPr lang="en-US">
+              <a:solidFill>
+                <a:srgbClr val="111111"/>
+              </a:solidFill>
+            </a:endParaRPr>
+          </a:p>
+        </p:txBody>
+      </p:sp>
+      <p:sp>
+        <p:nvSpPr>
+          <p:cNvPr id="6" name="Slide Number Placeholder 5"/>
+          <p:cNvSpPr>
+            <a:spLocks noGrp="1"/>
+          </p:cNvSpPr>
+          <p:nvPr>
+            <p:ph type="sldNum" sz="quarter" idx="12"/>
           </p:nvPr>
         </p:nvSpPr>
         <p:spPr/>
@@ -889,53 +1552,7 @@
           <a:bodyPr/>
           <a:lstStyle/>
           <a:p>
-            <a:fld id="{5BCAD085-E8A6-8845-BD4E-CB4CCA059FC4}" type="datetimeFigureOut">
-              <a:rPr lang="en-US" smtClean="0">
-                <a:solidFill>
-                  <a:srgbClr val="111111"/>
-                </a:solidFill>
-              </a:rPr>
-              <a:t>1/27/13</a:t>
-            </a:fld>
-            <a:endParaRPr lang="en-US"/>
-          </a:p>
-        </p:txBody>
-      </p:sp>
-      <p:sp>
-        <p:nvSpPr>
-          <p:cNvPr id="5" name="Footer Placeholder 4"/>
-          <p:cNvSpPr>
-            <a:spLocks noGrp="1"/>
-          </p:cNvSpPr>
-          <p:nvPr>
-            <p:ph type="ftr" sz="quarter" idx="11"/>
-          </p:nvPr>
-        </p:nvSpPr>
-        <p:spPr/>
-        <p:txBody>
-          <a:bodyPr/>
-          <a:lstStyle/>
-          <a:p>
-            <a:endParaRPr lang="en-US"/>
-          </a:p>
-        </p:txBody>
-      </p:sp>
-      <p:sp>
-        <p:nvSpPr>
-          <p:cNvPr id="6" name="Slide Number Placeholder 5"/>
-          <p:cNvSpPr>
-            <a:spLocks noGrp="1"/>
-          </p:cNvSpPr>
-          <p:nvPr>
-            <p:ph type="sldNum" sz="quarter" idx="12"/>
-          </p:nvPr>
-        </p:nvSpPr>
-        <p:spPr/>
-        <p:txBody>
-          <a:bodyPr/>
-          <a:lstStyle/>
-          <a:p>
-            <a:fld id="{C1FF6DA9-008F-8B48-92A6-B652298478BF}" type="slidenum">
+            <a:fld id="{C5EF2332-01BF-834F-8236-50238282D533}" type="slidenum">
               <a:rPr lang="en-US" smtClean="0">
                 <a:solidFill>
                   <a:srgbClr val="111111"/>
@@ -943,14 +1560,18 @@
               </a:rPr>
               <a:t>‹#›</a:t>
             </a:fld>
-            <a:endParaRPr lang="en-US"/>
+            <a:endParaRPr lang="en-US">
+              <a:solidFill>
+                <a:srgbClr val="111111"/>
+              </a:solidFill>
+            </a:endParaRPr>
           </a:p>
         </p:txBody>
       </p:sp>
     </p:spTree>
     <p:extLst>
       <p:ext uri="{BB962C8B-B14F-4D97-AF65-F5344CB8AC3E}">
-        <p14:creationId xmlns:p14="http://schemas.microsoft.com/office/powerpoint/2010/main" val="2614314258"/>
+        <p14:creationId xmlns:p14="http://schemas.microsoft.com/office/powerpoint/2010/main" val="338346009"/>
       </p:ext>
     </p:extLst>
   </p:cSld>
@@ -989,15 +1610,15 @@
         </p:nvSpPr>
         <p:spPr>
           <a:xfrm>
-            <a:off x="722313" y="4406900"/>
-            <a:ext cx="7772400" cy="1362075"/>
+            <a:off x="722313" y="3305176"/>
+            <a:ext cx="7772400" cy="1021556"/>
           </a:xfrm>
         </p:spPr>
         <p:txBody>
           <a:bodyPr anchor="t"/>
           <a:lstStyle>
             <a:lvl1pPr algn="l">
-              <a:defRPr sz="4000" b="1" cap="all">
+              <a:defRPr sz="3000" b="1" cap="all">
                 <a:solidFill>
                   <a:srgbClr val="111111"/>
                 </a:solidFill>
@@ -1006,14 +1627,13 @@
           </a:lstStyle>
           <a:p>
             <a:r>
-              <a:rPr lang="en-US" smtClean="0">
+              <a:rPr lang="en-US">
                 <a:solidFill>
                   <a:srgbClr val="111111"/>
                 </a:solidFill>
               </a:rPr>
               <a:t>Click to edit Master title style</a:t>
             </a:r>
-            <a:endParaRPr lang="en-US"/>
           </a:p>
         </p:txBody>
       </p:sp>
@@ -1029,8 +1649,8 @@
         </p:nvSpPr>
         <p:spPr>
           <a:xfrm>
-            <a:off x="722313" y="2906713"/>
-            <a:ext cx="7772400" cy="1500187"/>
+            <a:off x="722313" y="2180035"/>
+            <a:ext cx="7772400" cy="1125140"/>
           </a:xfrm>
         </p:spPr>
         <p:txBody>
@@ -1038,71 +1658,71 @@
           <a:lstStyle>
             <a:lvl1pPr marL="0" indent="0">
               <a:buNone/>
-              <a:defRPr sz="2000">
+              <a:defRPr sz="1500">
                 <a:solidFill>
                   <a:srgbClr val="111111"/>
                 </a:solidFill>
               </a:defRPr>
             </a:lvl1pPr>
-            <a:lvl2pPr marL="457200" indent="0">
-              <a:buNone/>
-              <a:defRPr sz="1800">
+            <a:lvl2pPr marL="342900" indent="0">
+              <a:buNone/>
+              <a:defRPr sz="1350">
                 <a:solidFill>
                   <a:srgbClr val="111111"/>
                 </a:solidFill>
               </a:defRPr>
             </a:lvl2pPr>
-            <a:lvl3pPr marL="914400" indent="0">
-              <a:buNone/>
-              <a:defRPr sz="1600">
+            <a:lvl3pPr marL="685800" indent="0">
+              <a:buNone/>
+              <a:defRPr sz="1200">
                 <a:solidFill>
                   <a:srgbClr val="111111"/>
                 </a:solidFill>
               </a:defRPr>
             </a:lvl3pPr>
-            <a:lvl4pPr marL="1371600" indent="0">
-              <a:buNone/>
-              <a:defRPr sz="1400">
+            <a:lvl4pPr marL="1028700" indent="0">
+              <a:buNone/>
+              <a:defRPr sz="1050">
                 <a:solidFill>
                   <a:srgbClr val="111111"/>
                 </a:solidFill>
               </a:defRPr>
             </a:lvl4pPr>
-            <a:lvl5pPr marL="1828800" indent="0">
-              <a:buNone/>
-              <a:defRPr sz="1400">
+            <a:lvl5pPr marL="1371600" indent="0">
+              <a:buNone/>
+              <a:defRPr sz="1050">
                 <a:solidFill>
                   <a:srgbClr val="111111"/>
                 </a:solidFill>
               </a:defRPr>
             </a:lvl5pPr>
-            <a:lvl6pPr marL="2286000" indent="0">
-              <a:buNone/>
-              <a:defRPr sz="1400">
+            <a:lvl6pPr marL="1714500" indent="0">
+              <a:buNone/>
+              <a:defRPr sz="1050">
                 <a:solidFill>
                   <a:srgbClr val="111111"/>
                 </a:solidFill>
               </a:defRPr>
             </a:lvl6pPr>
-            <a:lvl7pPr marL="2743200" indent="0">
-              <a:buNone/>
-              <a:defRPr sz="1400">
+            <a:lvl7pPr marL="2057400" indent="0">
+              <a:buNone/>
+              <a:defRPr sz="1050">
                 <a:solidFill>
                   <a:srgbClr val="111111"/>
                 </a:solidFill>
               </a:defRPr>
             </a:lvl7pPr>
-            <a:lvl8pPr marL="3200400" indent="0">
-              <a:buNone/>
-              <a:defRPr sz="1400">
+            <a:lvl8pPr marL="2400300" indent="0">
+              <a:buNone/>
+              <a:defRPr sz="1050">
                 <a:solidFill>
                   <a:srgbClr val="111111"/>
                 </a:solidFill>
               </a:defRPr>
             </a:lvl8pPr>
-            <a:lvl9pPr marL="3657600" indent="0">
-              <a:buNone/>
-              <a:defRPr sz="1400">
+            <a:lvl9pPr marL="2743200" indent="0">
+              <a:buNone/>
+              <a:defRPr sz="1050">
                 <a:solidFill>
                   <a:srgbClr val="111111"/>
                 </a:solidFill>
@@ -1112,24 +1732,55 @@
           <a:p>
             <a:pPr lvl="0"/>
             <a:r>
+              <a:rPr lang="en-US">
+                <a:solidFill>
+                  <a:srgbClr val="111111"/>
+                </a:solidFill>
+              </a:rPr>
+              <a:t>Click to edit Master text styles</a:t>
+            </a:r>
+          </a:p>
+        </p:txBody>
+      </p:sp>
+      <p:sp>
+        <p:nvSpPr>
+          <p:cNvPr id="4" name="Date Placeholder 3"/>
+          <p:cNvSpPr>
+            <a:spLocks noGrp="1"/>
+          </p:cNvSpPr>
+          <p:nvPr>
+            <p:ph type="dt" sz="half" idx="10"/>
+          </p:nvPr>
+        </p:nvSpPr>
+        <p:spPr/>
+        <p:txBody>
+          <a:bodyPr/>
+          <a:lstStyle/>
+          <a:p>
+            <a:fld id="{241EB5C9-1307-BA42-ABA2-0BC069CD8E7F}" type="datetimeFigureOut">
               <a:rPr lang="en-US" smtClean="0">
                 <a:solidFill>
                   <a:srgbClr val="111111"/>
                 </a:solidFill>
               </a:rPr>
-              <a:t>Click to edit Master text styles</a:t>
-            </a:r>
-          </a:p>
-        </p:txBody>
-      </p:sp>
-      <p:sp>
-        <p:nvSpPr>
-          <p:cNvPr id="4" name="Date Placeholder 3"/>
-          <p:cNvSpPr>
-            <a:spLocks noGrp="1"/>
-          </p:cNvSpPr>
-          <p:nvPr>
-            <p:ph type="dt" sz="half" idx="10"/>
+              <a:t>1/2/22</a:t>
+            </a:fld>
+            <a:endParaRPr lang="en-US">
+              <a:solidFill>
+                <a:srgbClr val="111111"/>
+              </a:solidFill>
+            </a:endParaRPr>
+          </a:p>
+        </p:txBody>
+      </p:sp>
+      <p:sp>
+        <p:nvSpPr>
+          <p:cNvPr id="5" name="Footer Placeholder 4"/>
+          <p:cNvSpPr>
+            <a:spLocks noGrp="1"/>
+          </p:cNvSpPr>
+          <p:nvPr>
+            <p:ph type="ftr" sz="quarter" idx="11"/>
           </p:nvPr>
         </p:nvSpPr>
         <p:spPr/>
@@ -1137,26 +1788,22 @@
           <a:bodyPr/>
           <a:lstStyle/>
           <a:p>
-            <a:fld id="{5BCAD085-E8A6-8845-BD4E-CB4CCA059FC4}" type="datetimeFigureOut">
-              <a:rPr lang="en-US" smtClean="0">
-                <a:solidFill>
-                  <a:srgbClr val="111111"/>
-                </a:solidFill>
-              </a:rPr>
-              <a:t>1/27/13</a:t>
-            </a:fld>
-            <a:endParaRPr lang="en-US"/>
-          </a:p>
-        </p:txBody>
-      </p:sp>
-      <p:sp>
-        <p:nvSpPr>
-          <p:cNvPr id="5" name="Footer Placeholder 4"/>
-          <p:cNvSpPr>
-            <a:spLocks noGrp="1"/>
-          </p:cNvSpPr>
-          <p:nvPr>
-            <p:ph type="ftr" sz="quarter" idx="11"/>
+            <a:endParaRPr lang="en-US">
+              <a:solidFill>
+                <a:srgbClr val="111111"/>
+              </a:solidFill>
+            </a:endParaRPr>
+          </a:p>
+        </p:txBody>
+      </p:sp>
+      <p:sp>
+        <p:nvSpPr>
+          <p:cNvPr id="6" name="Slide Number Placeholder 5"/>
+          <p:cNvSpPr>
+            <a:spLocks noGrp="1"/>
+          </p:cNvSpPr>
+          <p:nvPr>
+            <p:ph type="sldNum" sz="quarter" idx="12"/>
           </p:nvPr>
         </p:nvSpPr>
         <p:spPr/>
@@ -1164,26 +1811,7 @@
           <a:bodyPr/>
           <a:lstStyle/>
           <a:p>
-            <a:endParaRPr lang="en-US"/>
-          </a:p>
-        </p:txBody>
-      </p:sp>
-      <p:sp>
-        <p:nvSpPr>
-          <p:cNvPr id="6" name="Slide Number Placeholder 5"/>
-          <p:cNvSpPr>
-            <a:spLocks noGrp="1"/>
-          </p:cNvSpPr>
-          <p:nvPr>
-            <p:ph type="sldNum" sz="quarter" idx="12"/>
-          </p:nvPr>
-        </p:nvSpPr>
-        <p:spPr/>
-        <p:txBody>
-          <a:bodyPr/>
-          <a:lstStyle/>
-          <a:p>
-            <a:fld id="{C1FF6DA9-008F-8B48-92A6-B652298478BF}" type="slidenum">
+            <a:fld id="{C5EF2332-01BF-834F-8236-50238282D533}" type="slidenum">
               <a:rPr lang="en-US" smtClean="0">
                 <a:solidFill>
                   <a:srgbClr val="111111"/>
@@ -1191,14 +1819,18 @@
               </a:rPr>
               <a:t>‹#›</a:t>
             </a:fld>
-            <a:endParaRPr lang="en-US"/>
+            <a:endParaRPr lang="en-US">
+              <a:solidFill>
+                <a:srgbClr val="111111"/>
+              </a:solidFill>
+            </a:endParaRPr>
           </a:p>
         </p:txBody>
       </p:sp>
     </p:spTree>
     <p:extLst>
       <p:ext uri="{BB962C8B-B14F-4D97-AF65-F5344CB8AC3E}">
-        <p14:creationId xmlns:p14="http://schemas.microsoft.com/office/powerpoint/2010/main" val="960648375"/>
+        <p14:creationId xmlns:p14="http://schemas.microsoft.com/office/powerpoint/2010/main" val="1073069076"/>
       </p:ext>
     </p:extLst>
   </p:cSld>
@@ -1241,14 +1873,13 @@
           <a:lstStyle/>
           <a:p>
             <a:r>
-              <a:rPr lang="en-US" smtClean="0">
+              <a:rPr lang="en-US">
                 <a:solidFill>
                   <a:srgbClr val="111111"/>
                 </a:solidFill>
               </a:rPr>
               <a:t>Click to edit Master title style</a:t>
             </a:r>
-            <a:endParaRPr lang="en-US"/>
           </a:p>
         </p:txBody>
       </p:sp>
@@ -1264,71 +1895,71 @@
         </p:nvSpPr>
         <p:spPr>
           <a:xfrm>
-            <a:off x="457200" y="1600200"/>
-            <a:ext cx="4038600" cy="4525963"/>
+            <a:off x="457200" y="1200151"/>
+            <a:ext cx="4038600" cy="3394472"/>
           </a:xfrm>
         </p:spPr>
         <p:txBody>
           <a:bodyPr/>
           <a:lstStyle>
             <a:lvl1pPr>
-              <a:defRPr sz="2800">
+              <a:defRPr sz="2100">
                 <a:solidFill>
                   <a:srgbClr val="111111"/>
                 </a:solidFill>
               </a:defRPr>
             </a:lvl1pPr>
             <a:lvl2pPr>
-              <a:defRPr sz="2400">
+              <a:defRPr sz="1800">
                 <a:solidFill>
                   <a:srgbClr val="111111"/>
                 </a:solidFill>
               </a:defRPr>
             </a:lvl2pPr>
             <a:lvl3pPr>
-              <a:defRPr sz="2000">
+              <a:defRPr sz="1500">
                 <a:solidFill>
                   <a:srgbClr val="111111"/>
                 </a:solidFill>
               </a:defRPr>
             </a:lvl3pPr>
             <a:lvl4pPr>
-              <a:defRPr sz="1800">
+              <a:defRPr sz="1350">
                 <a:solidFill>
                   <a:srgbClr val="111111"/>
                 </a:solidFill>
               </a:defRPr>
             </a:lvl4pPr>
             <a:lvl5pPr>
-              <a:defRPr sz="1800">
+              <a:defRPr sz="1350">
                 <a:solidFill>
                   <a:srgbClr val="111111"/>
                 </a:solidFill>
               </a:defRPr>
             </a:lvl5pPr>
             <a:lvl6pPr>
-              <a:defRPr sz="1800">
+              <a:defRPr sz="1350">
                 <a:solidFill>
                   <a:srgbClr val="111111"/>
                 </a:solidFill>
               </a:defRPr>
             </a:lvl6pPr>
             <a:lvl7pPr>
-              <a:defRPr sz="1800">
+              <a:defRPr sz="1350">
                 <a:solidFill>
                   <a:srgbClr val="111111"/>
                 </a:solidFill>
               </a:defRPr>
             </a:lvl7pPr>
             <a:lvl8pPr>
-              <a:defRPr sz="1800">
+              <a:defRPr sz="1350">
                 <a:solidFill>
                   <a:srgbClr val="111111"/>
                 </a:solidFill>
               </a:defRPr>
             </a:lvl8pPr>
             <a:lvl9pPr>
-              <a:defRPr sz="1800">
+              <a:defRPr sz="1350">
                 <a:solidFill>
                   <a:srgbClr val="111111"/>
                 </a:solidFill>
@@ -1338,7 +1969,7 @@
           <a:p>
             <a:pPr lvl="0"/>
             <a:r>
-              <a:rPr lang="en-US" smtClean="0">
+              <a:rPr lang="en-US">
                 <a:solidFill>
                   <a:srgbClr val="111111"/>
                 </a:solidFill>
@@ -1349,7 +1980,7 @@
           <a:p>
             <a:pPr lvl="1"/>
             <a:r>
-              <a:rPr lang="en-US" smtClean="0">
+              <a:rPr lang="en-US">
                 <a:solidFill>
                   <a:srgbClr val="111111"/>
                 </a:solidFill>
@@ -1360,7 +1991,7 @@
           <a:p>
             <a:pPr lvl="2"/>
             <a:r>
-              <a:rPr lang="en-US" smtClean="0">
+              <a:rPr lang="en-US">
                 <a:solidFill>
                   <a:srgbClr val="111111"/>
                 </a:solidFill>
@@ -1371,7 +2002,7 @@
           <a:p>
             <a:pPr lvl="3"/>
             <a:r>
-              <a:rPr lang="en-US" smtClean="0">
+              <a:rPr lang="en-US">
                 <a:solidFill>
                   <a:srgbClr val="111111"/>
                 </a:solidFill>
@@ -1382,14 +2013,13 @@
           <a:p>
             <a:pPr lvl="4"/>
             <a:r>
-              <a:rPr lang="en-US" smtClean="0">
+              <a:rPr lang="en-US">
                 <a:solidFill>
                   <a:srgbClr val="111111"/>
                 </a:solidFill>
               </a:rPr>
               <a:t>Fifth level</a:t>
             </a:r>
-            <a:endParaRPr lang="en-US"/>
           </a:p>
         </p:txBody>
       </p:sp>
@@ -1405,71 +2035,71 @@
         </p:nvSpPr>
         <p:spPr>
           <a:xfrm>
-            <a:off x="4648200" y="1600200"/>
-            <a:ext cx="4038600" cy="4525963"/>
+            <a:off x="4648200" y="1200151"/>
+            <a:ext cx="4038600" cy="3394472"/>
           </a:xfrm>
         </p:spPr>
         <p:txBody>
           <a:bodyPr/>
           <a:lstStyle>
             <a:lvl1pPr>
-              <a:defRPr sz="2800">
+              <a:defRPr sz="2100">
                 <a:solidFill>
                   <a:srgbClr val="111111"/>
                 </a:solidFill>
               </a:defRPr>
             </a:lvl1pPr>
             <a:lvl2pPr>
-              <a:defRPr sz="2400">
+              <a:defRPr sz="1800">
                 <a:solidFill>
                   <a:srgbClr val="111111"/>
                 </a:solidFill>
               </a:defRPr>
             </a:lvl2pPr>
             <a:lvl3pPr>
-              <a:defRPr sz="2000">
+              <a:defRPr sz="1500">
                 <a:solidFill>
                   <a:srgbClr val="111111"/>
                 </a:solidFill>
               </a:defRPr>
             </a:lvl3pPr>
             <a:lvl4pPr>
-              <a:defRPr sz="1800">
+              <a:defRPr sz="1350">
                 <a:solidFill>
                   <a:srgbClr val="111111"/>
                 </a:solidFill>
               </a:defRPr>
             </a:lvl4pPr>
             <a:lvl5pPr>
-              <a:defRPr sz="1800">
+              <a:defRPr sz="1350">
                 <a:solidFill>
                   <a:srgbClr val="111111"/>
                 </a:solidFill>
               </a:defRPr>
             </a:lvl5pPr>
             <a:lvl6pPr>
-              <a:defRPr sz="1800">
+              <a:defRPr sz="1350">
                 <a:solidFill>
                   <a:srgbClr val="111111"/>
                 </a:solidFill>
               </a:defRPr>
             </a:lvl6pPr>
             <a:lvl7pPr>
-              <a:defRPr sz="1800">
+              <a:defRPr sz="1350">
                 <a:solidFill>
                   <a:srgbClr val="111111"/>
                 </a:solidFill>
               </a:defRPr>
             </a:lvl7pPr>
             <a:lvl8pPr>
-              <a:defRPr sz="1800">
+              <a:defRPr sz="1350">
                 <a:solidFill>
                   <a:srgbClr val="111111"/>
                 </a:solidFill>
               </a:defRPr>
             </a:lvl8pPr>
             <a:lvl9pPr>
-              <a:defRPr sz="1800">
+              <a:defRPr sz="1350">
                 <a:solidFill>
                   <a:srgbClr val="111111"/>
                 </a:solidFill>
@@ -1479,69 +2109,99 @@
           <a:p>
             <a:pPr lvl="0"/>
             <a:r>
+              <a:rPr lang="en-US">
+                <a:solidFill>
+                  <a:srgbClr val="111111"/>
+                </a:solidFill>
+              </a:rPr>
+              <a:t>Click to edit Master text styles</a:t>
+            </a:r>
+          </a:p>
+          <a:p>
+            <a:pPr lvl="1"/>
+            <a:r>
+              <a:rPr lang="en-US">
+                <a:solidFill>
+                  <a:srgbClr val="111111"/>
+                </a:solidFill>
+              </a:rPr>
+              <a:t>Second level</a:t>
+            </a:r>
+          </a:p>
+          <a:p>
+            <a:pPr lvl="2"/>
+            <a:r>
+              <a:rPr lang="en-US">
+                <a:solidFill>
+                  <a:srgbClr val="111111"/>
+                </a:solidFill>
+              </a:rPr>
+              <a:t>Third level</a:t>
+            </a:r>
+          </a:p>
+          <a:p>
+            <a:pPr lvl="3"/>
+            <a:r>
+              <a:rPr lang="en-US">
+                <a:solidFill>
+                  <a:srgbClr val="111111"/>
+                </a:solidFill>
+              </a:rPr>
+              <a:t>Fourth level</a:t>
+            </a:r>
+          </a:p>
+          <a:p>
+            <a:pPr lvl="4"/>
+            <a:r>
+              <a:rPr lang="en-US">
+                <a:solidFill>
+                  <a:srgbClr val="111111"/>
+                </a:solidFill>
+              </a:rPr>
+              <a:t>Fifth level</a:t>
+            </a:r>
+          </a:p>
+        </p:txBody>
+      </p:sp>
+      <p:sp>
+        <p:nvSpPr>
+          <p:cNvPr id="5" name="Date Placeholder 4"/>
+          <p:cNvSpPr>
+            <a:spLocks noGrp="1"/>
+          </p:cNvSpPr>
+          <p:nvPr>
+            <p:ph type="dt" sz="half" idx="10"/>
+          </p:nvPr>
+        </p:nvSpPr>
+        <p:spPr/>
+        <p:txBody>
+          <a:bodyPr/>
+          <a:lstStyle/>
+          <a:p>
+            <a:fld id="{241EB5C9-1307-BA42-ABA2-0BC069CD8E7F}" type="datetimeFigureOut">
               <a:rPr lang="en-US" smtClean="0">
                 <a:solidFill>
                   <a:srgbClr val="111111"/>
                 </a:solidFill>
               </a:rPr>
-              <a:t>Click to edit Master text styles</a:t>
-            </a:r>
-          </a:p>
-          <a:p>
-            <a:pPr lvl="1"/>
-            <a:r>
-              <a:rPr lang="en-US" smtClean="0">
-                <a:solidFill>
-                  <a:srgbClr val="111111"/>
-                </a:solidFill>
-              </a:rPr>
-              <a:t>Second level</a:t>
-            </a:r>
-          </a:p>
-          <a:p>
-            <a:pPr lvl="2"/>
-            <a:r>
-              <a:rPr lang="en-US" smtClean="0">
-                <a:solidFill>
-                  <a:srgbClr val="111111"/>
-                </a:solidFill>
-              </a:rPr>
-              <a:t>Third level</a:t>
-            </a:r>
-          </a:p>
-          <a:p>
-            <a:pPr lvl="3"/>
-            <a:r>
-              <a:rPr lang="en-US" smtClean="0">
-                <a:solidFill>
-                  <a:srgbClr val="111111"/>
-                </a:solidFill>
-              </a:rPr>
-              <a:t>Fourth level</a:t>
-            </a:r>
-          </a:p>
-          <a:p>
-            <a:pPr lvl="4"/>
-            <a:r>
-              <a:rPr lang="en-US" smtClean="0">
-                <a:solidFill>
-                  <a:srgbClr val="111111"/>
-                </a:solidFill>
-              </a:rPr>
-              <a:t>Fifth level</a:t>
-            </a:r>
-            <a:endParaRPr lang="en-US"/>
-          </a:p>
-        </p:txBody>
-      </p:sp>
-      <p:sp>
-        <p:nvSpPr>
-          <p:cNvPr id="5" name="Date Placeholder 4"/>
-          <p:cNvSpPr>
-            <a:spLocks noGrp="1"/>
-          </p:cNvSpPr>
-          <p:nvPr>
-            <p:ph type="dt" sz="half" idx="10"/>
+              <a:t>1/2/22</a:t>
+            </a:fld>
+            <a:endParaRPr lang="en-US">
+              <a:solidFill>
+                <a:srgbClr val="111111"/>
+              </a:solidFill>
+            </a:endParaRPr>
+          </a:p>
+        </p:txBody>
+      </p:sp>
+      <p:sp>
+        <p:nvSpPr>
+          <p:cNvPr id="6" name="Footer Placeholder 5"/>
+          <p:cNvSpPr>
+            <a:spLocks noGrp="1"/>
+          </p:cNvSpPr>
+          <p:nvPr>
+            <p:ph type="ftr" sz="quarter" idx="11"/>
           </p:nvPr>
         </p:nvSpPr>
         <p:spPr/>
@@ -1549,26 +2209,22 @@
           <a:bodyPr/>
           <a:lstStyle/>
           <a:p>
-            <a:fld id="{5BCAD085-E8A6-8845-BD4E-CB4CCA059FC4}" type="datetimeFigureOut">
-              <a:rPr lang="en-US" smtClean="0">
-                <a:solidFill>
-                  <a:srgbClr val="111111"/>
-                </a:solidFill>
-              </a:rPr>
-              <a:t>1/27/13</a:t>
-            </a:fld>
-            <a:endParaRPr lang="en-US"/>
-          </a:p>
-        </p:txBody>
-      </p:sp>
-      <p:sp>
-        <p:nvSpPr>
-          <p:cNvPr id="6" name="Footer Placeholder 5"/>
-          <p:cNvSpPr>
-            <a:spLocks noGrp="1"/>
-          </p:cNvSpPr>
-          <p:nvPr>
-            <p:ph type="ftr" sz="quarter" idx="11"/>
+            <a:endParaRPr lang="en-US">
+              <a:solidFill>
+                <a:srgbClr val="111111"/>
+              </a:solidFill>
+            </a:endParaRPr>
+          </a:p>
+        </p:txBody>
+      </p:sp>
+      <p:sp>
+        <p:nvSpPr>
+          <p:cNvPr id="7" name="Slide Number Placeholder 6"/>
+          <p:cNvSpPr>
+            <a:spLocks noGrp="1"/>
+          </p:cNvSpPr>
+          <p:nvPr>
+            <p:ph type="sldNum" sz="quarter" idx="12"/>
           </p:nvPr>
         </p:nvSpPr>
         <p:spPr/>
@@ -1576,26 +2232,7 @@
           <a:bodyPr/>
           <a:lstStyle/>
           <a:p>
-            <a:endParaRPr lang="en-US"/>
-          </a:p>
-        </p:txBody>
-      </p:sp>
-      <p:sp>
-        <p:nvSpPr>
-          <p:cNvPr id="7" name="Slide Number Placeholder 6"/>
-          <p:cNvSpPr>
-            <a:spLocks noGrp="1"/>
-          </p:cNvSpPr>
-          <p:nvPr>
-            <p:ph type="sldNum" sz="quarter" idx="12"/>
-          </p:nvPr>
-        </p:nvSpPr>
-        <p:spPr/>
-        <p:txBody>
-          <a:bodyPr/>
-          <a:lstStyle/>
-          <a:p>
-            <a:fld id="{C1FF6DA9-008F-8B48-92A6-B652298478BF}" type="slidenum">
+            <a:fld id="{C5EF2332-01BF-834F-8236-50238282D533}" type="slidenum">
               <a:rPr lang="en-US" smtClean="0">
                 <a:solidFill>
                   <a:srgbClr val="111111"/>
@@ -1603,14 +2240,18 @@
               </a:rPr>
               <a:t>‹#›</a:t>
             </a:fld>
-            <a:endParaRPr lang="en-US"/>
+            <a:endParaRPr lang="en-US">
+              <a:solidFill>
+                <a:srgbClr val="111111"/>
+              </a:solidFill>
+            </a:endParaRPr>
           </a:p>
         </p:txBody>
       </p:sp>
     </p:spTree>
     <p:extLst>
       <p:ext uri="{BB962C8B-B14F-4D97-AF65-F5344CB8AC3E}">
-        <p14:creationId xmlns:p14="http://schemas.microsoft.com/office/powerpoint/2010/main" val="2782244947"/>
+        <p14:creationId xmlns:p14="http://schemas.microsoft.com/office/powerpoint/2010/main" val="2619886245"/>
       </p:ext>
     </p:extLst>
   </p:cSld>
@@ -1661,14 +2302,13 @@
           </a:lstStyle>
           <a:p>
             <a:r>
-              <a:rPr lang="en-US" smtClean="0">
+              <a:rPr lang="en-US">
                 <a:solidFill>
                   <a:srgbClr val="111111"/>
                 </a:solidFill>
               </a:rPr>
               <a:t>Click to edit Master title style</a:t>
             </a:r>
-            <a:endParaRPr lang="en-US"/>
           </a:p>
         </p:txBody>
       </p:sp>
@@ -1684,8 +2324,8 @@
         </p:nvSpPr>
         <p:spPr>
           <a:xfrm>
-            <a:off x="457200" y="1535113"/>
-            <a:ext cx="4040188" cy="639762"/>
+            <a:off x="457200" y="1151335"/>
+            <a:ext cx="4040188" cy="479822"/>
           </a:xfrm>
         </p:spPr>
         <p:txBody>
@@ -1693,71 +2333,71 @@
           <a:lstStyle>
             <a:lvl1pPr marL="0" indent="0">
               <a:buNone/>
-              <a:defRPr sz="2400" b="1">
+              <a:defRPr sz="1800" b="1">
                 <a:solidFill>
                   <a:srgbClr val="111111"/>
                 </a:solidFill>
               </a:defRPr>
             </a:lvl1pPr>
-            <a:lvl2pPr marL="457200" indent="0">
-              <a:buNone/>
-              <a:defRPr sz="2000" b="1">
+            <a:lvl2pPr marL="342900" indent="0">
+              <a:buNone/>
+              <a:defRPr sz="1500" b="1">
                 <a:solidFill>
                   <a:srgbClr val="111111"/>
                 </a:solidFill>
               </a:defRPr>
             </a:lvl2pPr>
-            <a:lvl3pPr marL="914400" indent="0">
-              <a:buNone/>
-              <a:defRPr sz="1800" b="1">
+            <a:lvl3pPr marL="685800" indent="0">
+              <a:buNone/>
+              <a:defRPr sz="1350" b="1">
                 <a:solidFill>
                   <a:srgbClr val="111111"/>
                 </a:solidFill>
               </a:defRPr>
             </a:lvl3pPr>
-            <a:lvl4pPr marL="1371600" indent="0">
-              <a:buNone/>
-              <a:defRPr sz="1600" b="1">
+            <a:lvl4pPr marL="1028700" indent="0">
+              <a:buNone/>
+              <a:defRPr sz="1200" b="1">
                 <a:solidFill>
                   <a:srgbClr val="111111"/>
                 </a:solidFill>
               </a:defRPr>
             </a:lvl4pPr>
-            <a:lvl5pPr marL="1828800" indent="0">
-              <a:buNone/>
-              <a:defRPr sz="1600" b="1">
+            <a:lvl5pPr marL="1371600" indent="0">
+              <a:buNone/>
+              <a:defRPr sz="1200" b="1">
                 <a:solidFill>
                   <a:srgbClr val="111111"/>
                 </a:solidFill>
               </a:defRPr>
             </a:lvl5pPr>
-            <a:lvl6pPr marL="2286000" indent="0">
-              <a:buNone/>
-              <a:defRPr sz="1600" b="1">
+            <a:lvl6pPr marL="1714500" indent="0">
+              <a:buNone/>
+              <a:defRPr sz="1200" b="1">
                 <a:solidFill>
                   <a:srgbClr val="111111"/>
                 </a:solidFill>
               </a:defRPr>
             </a:lvl6pPr>
-            <a:lvl7pPr marL="2743200" indent="0">
-              <a:buNone/>
-              <a:defRPr sz="1600" b="1">
+            <a:lvl7pPr marL="2057400" indent="0">
+              <a:buNone/>
+              <a:defRPr sz="1200" b="1">
                 <a:solidFill>
                   <a:srgbClr val="111111"/>
                 </a:solidFill>
               </a:defRPr>
             </a:lvl7pPr>
-            <a:lvl8pPr marL="3200400" indent="0">
-              <a:buNone/>
-              <a:defRPr sz="1600" b="1">
+            <a:lvl8pPr marL="2400300" indent="0">
+              <a:buNone/>
+              <a:defRPr sz="1200" b="1">
                 <a:solidFill>
                   <a:srgbClr val="111111"/>
                 </a:solidFill>
               </a:defRPr>
             </a:lvl8pPr>
-            <a:lvl9pPr marL="3657600" indent="0">
-              <a:buNone/>
-              <a:defRPr sz="1600" b="1">
+            <a:lvl9pPr marL="2743200" indent="0">
+              <a:buNone/>
+              <a:defRPr sz="1200" b="1">
                 <a:solidFill>
                   <a:srgbClr val="111111"/>
                 </a:solidFill>
@@ -1767,7 +2407,7 @@
           <a:p>
             <a:pPr lvl="0"/>
             <a:r>
-              <a:rPr lang="en-US" smtClean="0">
+              <a:rPr lang="en-US">
                 <a:solidFill>
                   <a:srgbClr val="111111"/>
                 </a:solidFill>
@@ -1789,71 +2429,71 @@
         </p:nvSpPr>
         <p:spPr>
           <a:xfrm>
-            <a:off x="457200" y="2174875"/>
-            <a:ext cx="4040188" cy="3951288"/>
+            <a:off x="457200" y="1631156"/>
+            <a:ext cx="4040188" cy="2963466"/>
           </a:xfrm>
         </p:spPr>
         <p:txBody>
           <a:bodyPr/>
           <a:lstStyle>
             <a:lvl1pPr>
-              <a:defRPr sz="2400">
+              <a:defRPr sz="1800">
                 <a:solidFill>
                   <a:srgbClr val="111111"/>
                 </a:solidFill>
               </a:defRPr>
             </a:lvl1pPr>
             <a:lvl2pPr>
-              <a:defRPr sz="2000">
+              <a:defRPr sz="1500">
                 <a:solidFill>
                   <a:srgbClr val="111111"/>
                 </a:solidFill>
               </a:defRPr>
             </a:lvl2pPr>
             <a:lvl3pPr>
-              <a:defRPr sz="1800">
+              <a:defRPr sz="1350">
                 <a:solidFill>
                   <a:srgbClr val="111111"/>
                 </a:solidFill>
               </a:defRPr>
             </a:lvl3pPr>
             <a:lvl4pPr>
-              <a:defRPr sz="1600">
+              <a:defRPr sz="1200">
                 <a:solidFill>
                   <a:srgbClr val="111111"/>
                 </a:solidFill>
               </a:defRPr>
             </a:lvl4pPr>
             <a:lvl5pPr>
-              <a:defRPr sz="1600">
+              <a:defRPr sz="1200">
                 <a:solidFill>
                   <a:srgbClr val="111111"/>
                 </a:solidFill>
               </a:defRPr>
             </a:lvl5pPr>
             <a:lvl6pPr>
-              <a:defRPr sz="1600">
+              <a:defRPr sz="1200">
                 <a:solidFill>
                   <a:srgbClr val="111111"/>
                 </a:solidFill>
               </a:defRPr>
             </a:lvl6pPr>
             <a:lvl7pPr>
-              <a:defRPr sz="1600">
+              <a:defRPr sz="1200">
                 <a:solidFill>
                   <a:srgbClr val="111111"/>
                 </a:solidFill>
               </a:defRPr>
             </a:lvl7pPr>
             <a:lvl8pPr>
-              <a:defRPr sz="1600">
+              <a:defRPr sz="1200">
                 <a:solidFill>
                   <a:srgbClr val="111111"/>
                 </a:solidFill>
               </a:defRPr>
             </a:lvl8pPr>
             <a:lvl9pPr>
-              <a:defRPr sz="1600">
+              <a:defRPr sz="1200">
                 <a:solidFill>
                   <a:srgbClr val="111111"/>
                 </a:solidFill>
@@ -1863,7 +2503,7 @@
           <a:p>
             <a:pPr lvl="0"/>
             <a:r>
-              <a:rPr lang="en-US" smtClean="0">
+              <a:rPr lang="en-US">
                 <a:solidFill>
                   <a:srgbClr val="111111"/>
                 </a:solidFill>
@@ -1874,7 +2514,7 @@
           <a:p>
             <a:pPr lvl="1"/>
             <a:r>
-              <a:rPr lang="en-US" smtClean="0">
+              <a:rPr lang="en-US">
                 <a:solidFill>
                   <a:srgbClr val="111111"/>
                 </a:solidFill>
@@ -1885,7 +2525,7 @@
           <a:p>
             <a:pPr lvl="2"/>
             <a:r>
-              <a:rPr lang="en-US" smtClean="0">
+              <a:rPr lang="en-US">
                 <a:solidFill>
                   <a:srgbClr val="111111"/>
                 </a:solidFill>
@@ -1896,7 +2536,7 @@
           <a:p>
             <a:pPr lvl="3"/>
             <a:r>
-              <a:rPr lang="en-US" smtClean="0">
+              <a:rPr lang="en-US">
                 <a:solidFill>
                   <a:srgbClr val="111111"/>
                 </a:solidFill>
@@ -1907,14 +2547,13 @@
           <a:p>
             <a:pPr lvl="4"/>
             <a:r>
-              <a:rPr lang="en-US" smtClean="0">
+              <a:rPr lang="en-US">
                 <a:solidFill>
                   <a:srgbClr val="111111"/>
                 </a:solidFill>
               </a:rPr>
               <a:t>Fifth level</a:t>
             </a:r>
-            <a:endParaRPr lang="en-US"/>
           </a:p>
         </p:txBody>
       </p:sp>
@@ -1930,8 +2569,8 @@
         </p:nvSpPr>
         <p:spPr>
           <a:xfrm>
-            <a:off x="4645025" y="1535113"/>
-            <a:ext cx="4041775" cy="639762"/>
+            <a:off x="4645026" y="1151335"/>
+            <a:ext cx="4041775" cy="479822"/>
           </a:xfrm>
         </p:spPr>
         <p:txBody>
@@ -1939,71 +2578,71 @@
           <a:lstStyle>
             <a:lvl1pPr marL="0" indent="0">
               <a:buNone/>
-              <a:defRPr sz="2400" b="1">
+              <a:defRPr sz="1800" b="1">
                 <a:solidFill>
                   <a:srgbClr val="111111"/>
                 </a:solidFill>
               </a:defRPr>
             </a:lvl1pPr>
-            <a:lvl2pPr marL="457200" indent="0">
-              <a:buNone/>
-              <a:defRPr sz="2000" b="1">
+            <a:lvl2pPr marL="342900" indent="0">
+              <a:buNone/>
+              <a:defRPr sz="1500" b="1">
                 <a:solidFill>
                   <a:srgbClr val="111111"/>
                 </a:solidFill>
               </a:defRPr>
             </a:lvl2pPr>
-            <a:lvl3pPr marL="914400" indent="0">
-              <a:buNone/>
-              <a:defRPr sz="1800" b="1">
+            <a:lvl3pPr marL="685800" indent="0">
+              <a:buNone/>
+              <a:defRPr sz="1350" b="1">
                 <a:solidFill>
                   <a:srgbClr val="111111"/>
                 </a:solidFill>
               </a:defRPr>
             </a:lvl3pPr>
-            <a:lvl4pPr marL="1371600" indent="0">
-              <a:buNone/>
-              <a:defRPr sz="1600" b="1">
+            <a:lvl4pPr marL="1028700" indent="0">
+              <a:buNone/>
+              <a:defRPr sz="1200" b="1">
                 <a:solidFill>
                   <a:srgbClr val="111111"/>
                 </a:solidFill>
               </a:defRPr>
             </a:lvl4pPr>
-            <a:lvl5pPr marL="1828800" indent="0">
-              <a:buNone/>
-              <a:defRPr sz="1600" b="1">
+            <a:lvl5pPr marL="1371600" indent="0">
+              <a:buNone/>
+              <a:defRPr sz="1200" b="1">
                 <a:solidFill>
                   <a:srgbClr val="111111"/>
                 </a:solidFill>
               </a:defRPr>
             </a:lvl5pPr>
-            <a:lvl6pPr marL="2286000" indent="0">
-              <a:buNone/>
-              <a:defRPr sz="1600" b="1">
+            <a:lvl6pPr marL="1714500" indent="0">
+              <a:buNone/>
+              <a:defRPr sz="1200" b="1">
                 <a:solidFill>
                   <a:srgbClr val="111111"/>
                 </a:solidFill>
               </a:defRPr>
             </a:lvl6pPr>
-            <a:lvl7pPr marL="2743200" indent="0">
-              <a:buNone/>
-              <a:defRPr sz="1600" b="1">
+            <a:lvl7pPr marL="2057400" indent="0">
+              <a:buNone/>
+              <a:defRPr sz="1200" b="1">
                 <a:solidFill>
                   <a:srgbClr val="111111"/>
                 </a:solidFill>
               </a:defRPr>
             </a:lvl7pPr>
-            <a:lvl8pPr marL="3200400" indent="0">
-              <a:buNone/>
-              <a:defRPr sz="1600" b="1">
+            <a:lvl8pPr marL="2400300" indent="0">
+              <a:buNone/>
+              <a:defRPr sz="1200" b="1">
                 <a:solidFill>
                   <a:srgbClr val="111111"/>
                 </a:solidFill>
               </a:defRPr>
             </a:lvl8pPr>
-            <a:lvl9pPr marL="3657600" indent="0">
-              <a:buNone/>
-              <a:defRPr sz="1600" b="1">
+            <a:lvl9pPr marL="2743200" indent="0">
+              <a:buNone/>
+              <a:defRPr sz="1200" b="1">
                 <a:solidFill>
                   <a:srgbClr val="111111"/>
                 </a:solidFill>
@@ -2013,7 +2652,7 @@
           <a:p>
             <a:pPr lvl="0"/>
             <a:r>
-              <a:rPr lang="en-US" smtClean="0">
+              <a:rPr lang="en-US">
                 <a:solidFill>
                   <a:srgbClr val="111111"/>
                 </a:solidFill>
@@ -2035,71 +2674,71 @@
         </p:nvSpPr>
         <p:spPr>
           <a:xfrm>
-            <a:off x="4645025" y="2174875"/>
-            <a:ext cx="4041775" cy="3951288"/>
+            <a:off x="4645026" y="1631156"/>
+            <a:ext cx="4041775" cy="2963466"/>
           </a:xfrm>
         </p:spPr>
         <p:txBody>
           <a:bodyPr/>
           <a:lstStyle>
             <a:lvl1pPr>
-              <a:defRPr sz="2400">
+              <a:defRPr sz="1800">
                 <a:solidFill>
                   <a:srgbClr val="111111"/>
                 </a:solidFill>
               </a:defRPr>
             </a:lvl1pPr>
             <a:lvl2pPr>
-              <a:defRPr sz="2000">
+              <a:defRPr sz="1500">
                 <a:solidFill>
                   <a:srgbClr val="111111"/>
                 </a:solidFill>
               </a:defRPr>
             </a:lvl2pPr>
             <a:lvl3pPr>
-              <a:defRPr sz="1800">
+              <a:defRPr sz="1350">
                 <a:solidFill>
                   <a:srgbClr val="111111"/>
                 </a:solidFill>
               </a:defRPr>
             </a:lvl3pPr>
             <a:lvl4pPr>
-              <a:defRPr sz="1600">
+              <a:defRPr sz="1200">
                 <a:solidFill>
                   <a:srgbClr val="111111"/>
                 </a:solidFill>
               </a:defRPr>
             </a:lvl4pPr>
             <a:lvl5pPr>
-              <a:defRPr sz="1600">
+              <a:defRPr sz="1200">
                 <a:solidFill>
                   <a:srgbClr val="111111"/>
                 </a:solidFill>
               </a:defRPr>
             </a:lvl5pPr>
             <a:lvl6pPr>
-              <a:defRPr sz="1600">
+              <a:defRPr sz="1200">
                 <a:solidFill>
                   <a:srgbClr val="111111"/>
                 </a:solidFill>
               </a:defRPr>
             </a:lvl6pPr>
             <a:lvl7pPr>
-              <a:defRPr sz="1600">
+              <a:defRPr sz="1200">
                 <a:solidFill>
                   <a:srgbClr val="111111"/>
                 </a:solidFill>
               </a:defRPr>
             </a:lvl7pPr>
             <a:lvl8pPr>
-              <a:defRPr sz="1600">
+              <a:defRPr sz="1200">
                 <a:solidFill>
                   <a:srgbClr val="111111"/>
                 </a:solidFill>
               </a:defRPr>
             </a:lvl8pPr>
             <a:lvl9pPr>
-              <a:defRPr sz="1600">
+              <a:defRPr sz="1200">
                 <a:solidFill>
                   <a:srgbClr val="111111"/>
                 </a:solidFill>
@@ -2109,69 +2748,99 @@
           <a:p>
             <a:pPr lvl="0"/>
             <a:r>
+              <a:rPr lang="en-US">
+                <a:solidFill>
+                  <a:srgbClr val="111111"/>
+                </a:solidFill>
+              </a:rPr>
+              <a:t>Click to edit Master text styles</a:t>
+            </a:r>
+          </a:p>
+          <a:p>
+            <a:pPr lvl="1"/>
+            <a:r>
+              <a:rPr lang="en-US">
+                <a:solidFill>
+                  <a:srgbClr val="111111"/>
+                </a:solidFill>
+              </a:rPr>
+              <a:t>Second level</a:t>
+            </a:r>
+          </a:p>
+          <a:p>
+            <a:pPr lvl="2"/>
+            <a:r>
+              <a:rPr lang="en-US">
+                <a:solidFill>
+                  <a:srgbClr val="111111"/>
+                </a:solidFill>
+              </a:rPr>
+              <a:t>Third level</a:t>
+            </a:r>
+          </a:p>
+          <a:p>
+            <a:pPr lvl="3"/>
+            <a:r>
+              <a:rPr lang="en-US">
+                <a:solidFill>
+                  <a:srgbClr val="111111"/>
+                </a:solidFill>
+              </a:rPr>
+              <a:t>Fourth level</a:t>
+            </a:r>
+          </a:p>
+          <a:p>
+            <a:pPr lvl="4"/>
+            <a:r>
+              <a:rPr lang="en-US">
+                <a:solidFill>
+                  <a:srgbClr val="111111"/>
+                </a:solidFill>
+              </a:rPr>
+              <a:t>Fifth level</a:t>
+            </a:r>
+          </a:p>
+        </p:txBody>
+      </p:sp>
+      <p:sp>
+        <p:nvSpPr>
+          <p:cNvPr id="7" name="Date Placeholder 6"/>
+          <p:cNvSpPr>
+            <a:spLocks noGrp="1"/>
+          </p:cNvSpPr>
+          <p:nvPr>
+            <p:ph type="dt" sz="half" idx="10"/>
+          </p:nvPr>
+        </p:nvSpPr>
+        <p:spPr/>
+        <p:txBody>
+          <a:bodyPr/>
+          <a:lstStyle/>
+          <a:p>
+            <a:fld id="{241EB5C9-1307-BA42-ABA2-0BC069CD8E7F}" type="datetimeFigureOut">
               <a:rPr lang="en-US" smtClean="0">
                 <a:solidFill>
                   <a:srgbClr val="111111"/>
                 </a:solidFill>
               </a:rPr>
-              <a:t>Click to edit Master text styles</a:t>
-            </a:r>
-          </a:p>
-          <a:p>
-            <a:pPr lvl="1"/>
-            <a:r>
-              <a:rPr lang="en-US" smtClean="0">
-                <a:solidFill>
-                  <a:srgbClr val="111111"/>
-                </a:solidFill>
-              </a:rPr>
-              <a:t>Second level</a:t>
-            </a:r>
-          </a:p>
-          <a:p>
-            <a:pPr lvl="2"/>
-            <a:r>
-              <a:rPr lang="en-US" smtClean="0">
-                <a:solidFill>
-                  <a:srgbClr val="111111"/>
-                </a:solidFill>
-              </a:rPr>
-              <a:t>Third level</a:t>
-            </a:r>
-          </a:p>
-          <a:p>
-            <a:pPr lvl="3"/>
-            <a:r>
-              <a:rPr lang="en-US" smtClean="0">
-                <a:solidFill>
-                  <a:srgbClr val="111111"/>
-                </a:solidFill>
-              </a:rPr>
-              <a:t>Fourth level</a:t>
-            </a:r>
-          </a:p>
-          <a:p>
-            <a:pPr lvl="4"/>
-            <a:r>
-              <a:rPr lang="en-US" smtClean="0">
-                <a:solidFill>
-                  <a:srgbClr val="111111"/>
-                </a:solidFill>
-              </a:rPr>
-              <a:t>Fifth level</a:t>
-            </a:r>
-            <a:endParaRPr lang="en-US"/>
-          </a:p>
-        </p:txBody>
-      </p:sp>
-      <p:sp>
-        <p:nvSpPr>
-          <p:cNvPr id="7" name="Date Placeholder 6"/>
-          <p:cNvSpPr>
-            <a:spLocks noGrp="1"/>
-          </p:cNvSpPr>
-          <p:nvPr>
-            <p:ph type="dt" sz="half" idx="10"/>
+              <a:t>1/2/22</a:t>
+            </a:fld>
+            <a:endParaRPr lang="en-US">
+              <a:solidFill>
+                <a:srgbClr val="111111"/>
+              </a:solidFill>
+            </a:endParaRPr>
+          </a:p>
+        </p:txBody>
+      </p:sp>
+      <p:sp>
+        <p:nvSpPr>
+          <p:cNvPr id="8" name="Footer Placeholder 7"/>
+          <p:cNvSpPr>
+            <a:spLocks noGrp="1"/>
+          </p:cNvSpPr>
+          <p:nvPr>
+            <p:ph type="ftr" sz="quarter" idx="11"/>
           </p:nvPr>
         </p:nvSpPr>
         <p:spPr/>
@@ -2179,26 +2848,22 @@
           <a:bodyPr/>
           <a:lstStyle/>
           <a:p>
-            <a:fld id="{5BCAD085-E8A6-8845-BD4E-CB4CCA059FC4}" type="datetimeFigureOut">
-              <a:rPr lang="en-US" smtClean="0">
-                <a:solidFill>
-                  <a:srgbClr val="111111"/>
-                </a:solidFill>
-              </a:rPr>
-              <a:t>1/27/13</a:t>
-            </a:fld>
-            <a:endParaRPr lang="en-US"/>
-          </a:p>
-        </p:txBody>
-      </p:sp>
-      <p:sp>
-        <p:nvSpPr>
-          <p:cNvPr id="8" name="Footer Placeholder 7"/>
-          <p:cNvSpPr>
-            <a:spLocks noGrp="1"/>
-          </p:cNvSpPr>
-          <p:nvPr>
-            <p:ph type="ftr" sz="quarter" idx="11"/>
+            <a:endParaRPr lang="en-US">
+              <a:solidFill>
+                <a:srgbClr val="111111"/>
+              </a:solidFill>
+            </a:endParaRPr>
+          </a:p>
+        </p:txBody>
+      </p:sp>
+      <p:sp>
+        <p:nvSpPr>
+          <p:cNvPr id="9" name="Slide Number Placeholder 8"/>
+          <p:cNvSpPr>
+            <a:spLocks noGrp="1"/>
+          </p:cNvSpPr>
+          <p:nvPr>
+            <p:ph type="sldNum" sz="quarter" idx="12"/>
           </p:nvPr>
         </p:nvSpPr>
         <p:spPr/>
@@ -2206,26 +2871,7 @@
           <a:bodyPr/>
           <a:lstStyle/>
           <a:p>
-            <a:endParaRPr lang="en-US"/>
-          </a:p>
-        </p:txBody>
-      </p:sp>
-      <p:sp>
-        <p:nvSpPr>
-          <p:cNvPr id="9" name="Slide Number Placeholder 8"/>
-          <p:cNvSpPr>
-            <a:spLocks noGrp="1"/>
-          </p:cNvSpPr>
-          <p:nvPr>
-            <p:ph type="sldNum" sz="quarter" idx="12"/>
-          </p:nvPr>
-        </p:nvSpPr>
-        <p:spPr/>
-        <p:txBody>
-          <a:bodyPr/>
-          <a:lstStyle/>
-          <a:p>
-            <a:fld id="{C1FF6DA9-008F-8B48-92A6-B652298478BF}" type="slidenum">
+            <a:fld id="{C5EF2332-01BF-834F-8236-50238282D533}" type="slidenum">
               <a:rPr lang="en-US" smtClean="0">
                 <a:solidFill>
                   <a:srgbClr val="111111"/>
@@ -2233,14 +2879,18 @@
               </a:rPr>
               <a:t>‹#›</a:t>
             </a:fld>
-            <a:endParaRPr lang="en-US"/>
+            <a:endParaRPr lang="en-US">
+              <a:solidFill>
+                <a:srgbClr val="111111"/>
+              </a:solidFill>
+            </a:endParaRPr>
           </a:p>
         </p:txBody>
       </p:sp>
     </p:spTree>
     <p:extLst>
       <p:ext uri="{BB962C8B-B14F-4D97-AF65-F5344CB8AC3E}">
-        <p14:creationId xmlns:p14="http://schemas.microsoft.com/office/powerpoint/2010/main" val="990158736"/>
+        <p14:creationId xmlns:p14="http://schemas.microsoft.com/office/powerpoint/2010/main" val="2535793967"/>
       </p:ext>
     </p:extLst>
   </p:cSld>
@@ -2283,25 +2933,55 @@
           <a:lstStyle/>
           <a:p>
             <a:r>
+              <a:rPr lang="en-US">
+                <a:solidFill>
+                  <a:srgbClr val="111111"/>
+                </a:solidFill>
+              </a:rPr>
+              <a:t>Click to edit Master title style</a:t>
+            </a:r>
+          </a:p>
+        </p:txBody>
+      </p:sp>
+      <p:sp>
+        <p:nvSpPr>
+          <p:cNvPr id="3" name="Date Placeholder 2"/>
+          <p:cNvSpPr>
+            <a:spLocks noGrp="1"/>
+          </p:cNvSpPr>
+          <p:nvPr>
+            <p:ph type="dt" sz="half" idx="10"/>
+          </p:nvPr>
+        </p:nvSpPr>
+        <p:spPr/>
+        <p:txBody>
+          <a:bodyPr/>
+          <a:lstStyle/>
+          <a:p>
+            <a:fld id="{241EB5C9-1307-BA42-ABA2-0BC069CD8E7F}" type="datetimeFigureOut">
               <a:rPr lang="en-US" smtClean="0">
                 <a:solidFill>
                   <a:srgbClr val="111111"/>
                 </a:solidFill>
               </a:rPr>
-              <a:t>Click to edit Master title style</a:t>
-            </a:r>
-            <a:endParaRPr lang="en-US"/>
-          </a:p>
-        </p:txBody>
-      </p:sp>
-      <p:sp>
-        <p:nvSpPr>
-          <p:cNvPr id="3" name="Date Placeholder 2"/>
-          <p:cNvSpPr>
-            <a:spLocks noGrp="1"/>
-          </p:cNvSpPr>
-          <p:nvPr>
-            <p:ph type="dt" sz="half" idx="10"/>
+              <a:t>1/2/22</a:t>
+            </a:fld>
+            <a:endParaRPr lang="en-US">
+              <a:solidFill>
+                <a:srgbClr val="111111"/>
+              </a:solidFill>
+            </a:endParaRPr>
+          </a:p>
+        </p:txBody>
+      </p:sp>
+      <p:sp>
+        <p:nvSpPr>
+          <p:cNvPr id="4" name="Footer Placeholder 3"/>
+          <p:cNvSpPr>
+            <a:spLocks noGrp="1"/>
+          </p:cNvSpPr>
+          <p:nvPr>
+            <p:ph type="ftr" sz="quarter" idx="11"/>
           </p:nvPr>
         </p:nvSpPr>
         <p:spPr/>
@@ -2309,26 +2989,22 @@
           <a:bodyPr/>
           <a:lstStyle/>
           <a:p>
-            <a:fld id="{5BCAD085-E8A6-8845-BD4E-CB4CCA059FC4}" type="datetimeFigureOut">
-              <a:rPr lang="en-US" smtClean="0">
-                <a:solidFill>
-                  <a:srgbClr val="111111"/>
-                </a:solidFill>
-              </a:rPr>
-              <a:t>1/27/13</a:t>
-            </a:fld>
-            <a:endParaRPr lang="en-US"/>
-          </a:p>
-        </p:txBody>
-      </p:sp>
-      <p:sp>
-        <p:nvSpPr>
-          <p:cNvPr id="4" name="Footer Placeholder 3"/>
-          <p:cNvSpPr>
-            <a:spLocks noGrp="1"/>
-          </p:cNvSpPr>
-          <p:nvPr>
-            <p:ph type="ftr" sz="quarter" idx="11"/>
+            <a:endParaRPr lang="en-US">
+              <a:solidFill>
+                <a:srgbClr val="111111"/>
+              </a:solidFill>
+            </a:endParaRPr>
+          </a:p>
+        </p:txBody>
+      </p:sp>
+      <p:sp>
+        <p:nvSpPr>
+          <p:cNvPr id="5" name="Slide Number Placeholder 4"/>
+          <p:cNvSpPr>
+            <a:spLocks noGrp="1"/>
+          </p:cNvSpPr>
+          <p:nvPr>
+            <p:ph type="sldNum" sz="quarter" idx="12"/>
           </p:nvPr>
         </p:nvSpPr>
         <p:spPr/>
@@ -2336,26 +3012,7 @@
           <a:bodyPr/>
           <a:lstStyle/>
           <a:p>
-            <a:endParaRPr lang="en-US"/>
-          </a:p>
-        </p:txBody>
-      </p:sp>
-      <p:sp>
-        <p:nvSpPr>
-          <p:cNvPr id="5" name="Slide Number Placeholder 4"/>
-          <p:cNvSpPr>
-            <a:spLocks noGrp="1"/>
-          </p:cNvSpPr>
-          <p:nvPr>
-            <p:ph type="sldNum" sz="quarter" idx="12"/>
-          </p:nvPr>
-        </p:nvSpPr>
-        <p:spPr/>
-        <p:txBody>
-          <a:bodyPr/>
-          <a:lstStyle/>
-          <a:p>
-            <a:fld id="{C1FF6DA9-008F-8B48-92A6-B652298478BF}" type="slidenum">
+            <a:fld id="{C5EF2332-01BF-834F-8236-50238282D533}" type="slidenum">
               <a:rPr lang="en-US" smtClean="0">
                 <a:solidFill>
                   <a:srgbClr val="111111"/>
@@ -2363,14 +3020,18 @@
               </a:rPr>
               <a:t>‹#›</a:t>
             </a:fld>
-            <a:endParaRPr lang="en-US"/>
+            <a:endParaRPr lang="en-US">
+              <a:solidFill>
+                <a:srgbClr val="111111"/>
+              </a:solidFill>
+            </a:endParaRPr>
           </a:p>
         </p:txBody>
       </p:sp>
     </p:spTree>
     <p:extLst>
       <p:ext uri="{BB962C8B-B14F-4D97-AF65-F5344CB8AC3E}">
-        <p14:creationId xmlns:p14="http://schemas.microsoft.com/office/powerpoint/2010/main" val="727027711"/>
+        <p14:creationId xmlns:p14="http://schemas.microsoft.com/office/powerpoint/2010/main" val="3472721253"/>
       </p:ext>
     </p:extLst>
   </p:cSld>
@@ -2412,15 +3073,19 @@
           <a:bodyPr/>
           <a:lstStyle/>
           <a:p>
-            <a:fld id="{5BCAD085-E8A6-8845-BD4E-CB4CCA059FC4}" type="datetimeFigureOut">
+            <a:fld id="{241EB5C9-1307-BA42-ABA2-0BC069CD8E7F}" type="datetimeFigureOut">
               <a:rPr lang="en-US" smtClean="0">
                 <a:solidFill>
                   <a:srgbClr val="111111"/>
                 </a:solidFill>
               </a:rPr>
-              <a:t>1/27/13</a:t>
+              <a:t>1/2/22</a:t>
             </a:fld>
-            <a:endParaRPr lang="en-US"/>
+            <a:endParaRPr lang="en-US">
+              <a:solidFill>
+                <a:srgbClr val="111111"/>
+              </a:solidFill>
+            </a:endParaRPr>
           </a:p>
         </p:txBody>
       </p:sp>
@@ -2439,7 +3104,11 @@
           <a:bodyPr/>
           <a:lstStyle/>
           <a:p>
-            <a:endParaRPr lang="en-US"/>
+            <a:endParaRPr lang="en-US">
+              <a:solidFill>
+                <a:srgbClr val="111111"/>
+              </a:solidFill>
+            </a:endParaRPr>
           </a:p>
         </p:txBody>
       </p:sp>
@@ -2458,7 +3127,7 @@
           <a:bodyPr/>
           <a:lstStyle/>
           <a:p>
-            <a:fld id="{C1FF6DA9-008F-8B48-92A6-B652298478BF}" type="slidenum">
+            <a:fld id="{C5EF2332-01BF-834F-8236-50238282D533}" type="slidenum">
               <a:rPr lang="en-US" smtClean="0">
                 <a:solidFill>
                   <a:srgbClr val="111111"/>
@@ -2466,14 +3135,18 @@
               </a:rPr>
               <a:t>‹#›</a:t>
             </a:fld>
-            <a:endParaRPr lang="en-US"/>
+            <a:endParaRPr lang="en-US">
+              <a:solidFill>
+                <a:srgbClr val="111111"/>
+              </a:solidFill>
+            </a:endParaRPr>
           </a:p>
         </p:txBody>
       </p:sp>
     </p:spTree>
     <p:extLst>
       <p:ext uri="{BB962C8B-B14F-4D97-AF65-F5344CB8AC3E}">
-        <p14:creationId xmlns:p14="http://schemas.microsoft.com/office/powerpoint/2010/main" val="1212999818"/>
+        <p14:creationId xmlns:p14="http://schemas.microsoft.com/office/powerpoint/2010/main" val="2130901097"/>
       </p:ext>
     </p:extLst>
   </p:cSld>
@@ -2512,15 +3185,15 @@
         </p:nvSpPr>
         <p:spPr>
           <a:xfrm>
-            <a:off x="457200" y="273050"/>
-            <a:ext cx="3008313" cy="1162050"/>
+            <a:off x="457201" y="204787"/>
+            <a:ext cx="3008313" cy="871538"/>
           </a:xfrm>
         </p:spPr>
         <p:txBody>
           <a:bodyPr anchor="b"/>
           <a:lstStyle>
             <a:lvl1pPr algn="l">
-              <a:defRPr sz="2000" b="1">
+              <a:defRPr sz="1500" b="1">
                 <a:solidFill>
                   <a:srgbClr val="111111"/>
                 </a:solidFill>
@@ -2529,14 +3202,13 @@
           </a:lstStyle>
           <a:p>
             <a:r>
-              <a:rPr lang="en-US" smtClean="0">
+              <a:rPr lang="en-US">
                 <a:solidFill>
                   <a:srgbClr val="111111"/>
                 </a:solidFill>
               </a:rPr>
               <a:t>Click to edit Master title style</a:t>
             </a:r>
-            <a:endParaRPr lang="en-US"/>
           </a:p>
         </p:txBody>
       </p:sp>
@@ -2552,71 +3224,71 @@
         </p:nvSpPr>
         <p:spPr>
           <a:xfrm>
-            <a:off x="3575050" y="273050"/>
-            <a:ext cx="5111750" cy="5853113"/>
+            <a:off x="3575050" y="204788"/>
+            <a:ext cx="5111750" cy="4389835"/>
           </a:xfrm>
         </p:spPr>
         <p:txBody>
           <a:bodyPr/>
           <a:lstStyle>
             <a:lvl1pPr>
-              <a:defRPr sz="3200">
+              <a:defRPr sz="2400">
                 <a:solidFill>
                   <a:srgbClr val="111111"/>
                 </a:solidFill>
               </a:defRPr>
             </a:lvl1pPr>
             <a:lvl2pPr>
-              <a:defRPr sz="2800">
+              <a:defRPr sz="2100">
                 <a:solidFill>
                   <a:srgbClr val="111111"/>
                 </a:solidFill>
               </a:defRPr>
             </a:lvl2pPr>
             <a:lvl3pPr>
-              <a:defRPr sz="2400">
+              <a:defRPr sz="1800">
                 <a:solidFill>
                   <a:srgbClr val="111111"/>
                 </a:solidFill>
               </a:defRPr>
             </a:lvl3pPr>
             <a:lvl4pPr>
-              <a:defRPr sz="2000">
+              <a:defRPr sz="1500">
                 <a:solidFill>
                   <a:srgbClr val="111111"/>
                 </a:solidFill>
               </a:defRPr>
             </a:lvl4pPr>
             <a:lvl5pPr>
-              <a:defRPr sz="2000">
+              <a:defRPr sz="1500">
                 <a:solidFill>
                   <a:srgbClr val="111111"/>
                 </a:solidFill>
               </a:defRPr>
             </a:lvl5pPr>
             <a:lvl6pPr>
-              <a:defRPr sz="2000">
+              <a:defRPr sz="1500">
                 <a:solidFill>
                   <a:srgbClr val="111111"/>
                 </a:solidFill>
               </a:defRPr>
             </a:lvl6pPr>
             <a:lvl7pPr>
-              <a:defRPr sz="2000">
+              <a:defRPr sz="1500">
                 <a:solidFill>
                   <a:srgbClr val="111111"/>
                 </a:solidFill>
               </a:defRPr>
             </a:lvl7pPr>
             <a:lvl8pPr>
-              <a:defRPr sz="2000">
+              <a:defRPr sz="1500">
                 <a:solidFill>
                   <a:srgbClr val="111111"/>
                 </a:solidFill>
               </a:defRPr>
             </a:lvl8pPr>
             <a:lvl9pPr>
-              <a:defRPr sz="2000">
+              <a:defRPr sz="1500">
                 <a:solidFill>
                   <a:srgbClr val="111111"/>
                 </a:solidFill>
@@ -2626,7 +3298,7 @@
           <a:p>
             <a:pPr lvl="0"/>
             <a:r>
-              <a:rPr lang="en-US" smtClean="0">
+              <a:rPr lang="en-US">
                 <a:solidFill>
                   <a:srgbClr val="111111"/>
                 </a:solidFill>
@@ -2637,7 +3309,7 @@
           <a:p>
             <a:pPr lvl="1"/>
             <a:r>
-              <a:rPr lang="en-US" smtClean="0">
+              <a:rPr lang="en-US">
                 <a:solidFill>
                   <a:srgbClr val="111111"/>
                 </a:solidFill>
@@ -2648,7 +3320,7 @@
           <a:p>
             <a:pPr lvl="2"/>
             <a:r>
-              <a:rPr lang="en-US" smtClean="0">
+              <a:rPr lang="en-US">
                 <a:solidFill>
                   <a:srgbClr val="111111"/>
                 </a:solidFill>
@@ -2659,7 +3331,7 @@
           <a:p>
             <a:pPr lvl="3"/>
             <a:r>
-              <a:rPr lang="en-US" smtClean="0">
+              <a:rPr lang="en-US">
                 <a:solidFill>
                   <a:srgbClr val="111111"/>
                 </a:solidFill>
@@ -2670,14 +3342,13 @@
           <a:p>
             <a:pPr lvl="4"/>
             <a:r>
-              <a:rPr lang="en-US" smtClean="0">
+              <a:rPr lang="en-US">
                 <a:solidFill>
                   <a:srgbClr val="111111"/>
                 </a:solidFill>
               </a:rPr>
               <a:t>Fifth level</a:t>
             </a:r>
-            <a:endParaRPr lang="en-US"/>
           </a:p>
         </p:txBody>
       </p:sp>
@@ -2693,8 +3364,8 @@
         </p:nvSpPr>
         <p:spPr>
           <a:xfrm>
-            <a:off x="457200" y="1435100"/>
-            <a:ext cx="3008313" cy="4691063"/>
+            <a:off x="457201" y="1076326"/>
+            <a:ext cx="3008313" cy="3518297"/>
           </a:xfrm>
         </p:spPr>
         <p:txBody>
@@ -2702,71 +3373,71 @@
           <a:lstStyle>
             <a:lvl1pPr marL="0" indent="0">
               <a:buNone/>
-              <a:defRPr sz="1400">
+              <a:defRPr sz="1050">
                 <a:solidFill>
                   <a:srgbClr val="111111"/>
                 </a:solidFill>
               </a:defRPr>
             </a:lvl1pPr>
-            <a:lvl2pPr marL="457200" indent="0">
-              <a:buNone/>
-              <a:defRPr sz="1200">
+            <a:lvl2pPr marL="342900" indent="0">
+              <a:buNone/>
+              <a:defRPr sz="900">
                 <a:solidFill>
                   <a:srgbClr val="111111"/>
                 </a:solidFill>
               </a:defRPr>
             </a:lvl2pPr>
-            <a:lvl3pPr marL="914400" indent="0">
-              <a:buNone/>
-              <a:defRPr sz="1000">
+            <a:lvl3pPr marL="685800" indent="0">
+              <a:buNone/>
+              <a:defRPr sz="750">
                 <a:solidFill>
                   <a:srgbClr val="111111"/>
                 </a:solidFill>
               </a:defRPr>
             </a:lvl3pPr>
-            <a:lvl4pPr marL="1371600" indent="0">
-              <a:buNone/>
-              <a:defRPr sz="900">
+            <a:lvl4pPr marL="1028700" indent="0">
+              <a:buNone/>
+              <a:defRPr sz="675">
                 <a:solidFill>
                   <a:srgbClr val="111111"/>
                 </a:solidFill>
               </a:defRPr>
             </a:lvl4pPr>
-            <a:lvl5pPr marL="1828800" indent="0">
-              <a:buNone/>
-              <a:defRPr sz="900">
+            <a:lvl5pPr marL="1371600" indent="0">
+              <a:buNone/>
+              <a:defRPr sz="675">
                 <a:solidFill>
                   <a:srgbClr val="111111"/>
                 </a:solidFill>
               </a:defRPr>
             </a:lvl5pPr>
-            <a:lvl6pPr marL="2286000" indent="0">
-              <a:buNone/>
-              <a:defRPr sz="900">
+            <a:lvl6pPr marL="1714500" indent="0">
+              <a:buNone/>
+              <a:defRPr sz="675">
                 <a:solidFill>
                   <a:srgbClr val="111111"/>
                 </a:solidFill>
               </a:defRPr>
             </a:lvl6pPr>
-            <a:lvl7pPr marL="2743200" indent="0">
-              <a:buNone/>
-              <a:defRPr sz="900">
+            <a:lvl7pPr marL="2057400" indent="0">
+              <a:buNone/>
+              <a:defRPr sz="675">
                 <a:solidFill>
                   <a:srgbClr val="111111"/>
                 </a:solidFill>
               </a:defRPr>
             </a:lvl7pPr>
-            <a:lvl8pPr marL="3200400" indent="0">
-              <a:buNone/>
-              <a:defRPr sz="900">
+            <a:lvl8pPr marL="2400300" indent="0">
+              <a:buNone/>
+              <a:defRPr sz="675">
                 <a:solidFill>
                   <a:srgbClr val="111111"/>
                 </a:solidFill>
               </a:defRPr>
             </a:lvl8pPr>
-            <a:lvl9pPr marL="3657600" indent="0">
-              <a:buNone/>
-              <a:defRPr sz="900">
+            <a:lvl9pPr marL="2743200" indent="0">
+              <a:buNone/>
+              <a:defRPr sz="675">
                 <a:solidFill>
                   <a:srgbClr val="111111"/>
                 </a:solidFill>
@@ -2776,24 +3447,55 @@
           <a:p>
             <a:pPr lvl="0"/>
             <a:r>
+              <a:rPr lang="en-US">
+                <a:solidFill>
+                  <a:srgbClr val="111111"/>
+                </a:solidFill>
+              </a:rPr>
+              <a:t>Click to edit Master text styles</a:t>
+            </a:r>
+          </a:p>
+        </p:txBody>
+      </p:sp>
+      <p:sp>
+        <p:nvSpPr>
+          <p:cNvPr id="5" name="Date Placeholder 4"/>
+          <p:cNvSpPr>
+            <a:spLocks noGrp="1"/>
+          </p:cNvSpPr>
+          <p:nvPr>
+            <p:ph type="dt" sz="half" idx="10"/>
+          </p:nvPr>
+        </p:nvSpPr>
+        <p:spPr/>
+        <p:txBody>
+          <a:bodyPr/>
+          <a:lstStyle/>
+          <a:p>
+            <a:fld id="{241EB5C9-1307-BA42-ABA2-0BC069CD8E7F}" type="datetimeFigureOut">
               <a:rPr lang="en-US" smtClean="0">
                 <a:solidFill>
                   <a:srgbClr val="111111"/>
                 </a:solidFill>
               </a:rPr>
-              <a:t>Click to edit Master text styles</a:t>
-            </a:r>
-          </a:p>
-        </p:txBody>
-      </p:sp>
-      <p:sp>
-        <p:nvSpPr>
-          <p:cNvPr id="5" name="Date Placeholder 4"/>
-          <p:cNvSpPr>
-            <a:spLocks noGrp="1"/>
-          </p:cNvSpPr>
-          <p:nvPr>
-            <p:ph type="dt" sz="half" idx="10"/>
+              <a:t>1/2/22</a:t>
+            </a:fld>
+            <a:endParaRPr lang="en-US">
+              <a:solidFill>
+                <a:srgbClr val="111111"/>
+              </a:solidFill>
+            </a:endParaRPr>
+          </a:p>
+        </p:txBody>
+      </p:sp>
+      <p:sp>
+        <p:nvSpPr>
+          <p:cNvPr id="6" name="Footer Placeholder 5"/>
+          <p:cNvSpPr>
+            <a:spLocks noGrp="1"/>
+          </p:cNvSpPr>
+          <p:nvPr>
+            <p:ph type="ftr" sz="quarter" idx="11"/>
           </p:nvPr>
         </p:nvSpPr>
         <p:spPr/>
@@ -2801,26 +3503,22 @@
           <a:bodyPr/>
           <a:lstStyle/>
           <a:p>
-            <a:fld id="{5BCAD085-E8A6-8845-BD4E-CB4CCA059FC4}" type="datetimeFigureOut">
-              <a:rPr lang="en-US" smtClean="0">
-                <a:solidFill>
-                  <a:srgbClr val="111111"/>
-                </a:solidFill>
-              </a:rPr>
-              <a:t>1/27/13</a:t>
-            </a:fld>
-            <a:endParaRPr lang="en-US"/>
-          </a:p>
-        </p:txBody>
-      </p:sp>
-      <p:sp>
-        <p:nvSpPr>
-          <p:cNvPr id="6" name="Footer Placeholder 5"/>
-          <p:cNvSpPr>
-            <a:spLocks noGrp="1"/>
-          </p:cNvSpPr>
-          <p:nvPr>
-            <p:ph type="ftr" sz="quarter" idx="11"/>
+            <a:endParaRPr lang="en-US">
+              <a:solidFill>
+                <a:srgbClr val="111111"/>
+              </a:solidFill>
+            </a:endParaRPr>
+          </a:p>
+        </p:txBody>
+      </p:sp>
+      <p:sp>
+        <p:nvSpPr>
+          <p:cNvPr id="7" name="Slide Number Placeholder 6"/>
+          <p:cNvSpPr>
+            <a:spLocks noGrp="1"/>
+          </p:cNvSpPr>
+          <p:nvPr>
+            <p:ph type="sldNum" sz="quarter" idx="12"/>
           </p:nvPr>
         </p:nvSpPr>
         <p:spPr/>
@@ -2828,26 +3526,7 @@
           <a:bodyPr/>
           <a:lstStyle/>
           <a:p>
-            <a:endParaRPr lang="en-US"/>
-          </a:p>
-        </p:txBody>
-      </p:sp>
-      <p:sp>
-        <p:nvSpPr>
-          <p:cNvPr id="7" name="Slide Number Placeholder 6"/>
-          <p:cNvSpPr>
-            <a:spLocks noGrp="1"/>
-          </p:cNvSpPr>
-          <p:nvPr>
-            <p:ph type="sldNum" sz="quarter" idx="12"/>
-          </p:nvPr>
-        </p:nvSpPr>
-        <p:spPr/>
-        <p:txBody>
-          <a:bodyPr/>
-          <a:lstStyle/>
-          <a:p>
-            <a:fld id="{C1FF6DA9-008F-8B48-92A6-B652298478BF}" type="slidenum">
+            <a:fld id="{C5EF2332-01BF-834F-8236-50238282D533}" type="slidenum">
               <a:rPr lang="en-US" smtClean="0">
                 <a:solidFill>
                   <a:srgbClr val="111111"/>
@@ -2855,14 +3534,18 @@
               </a:rPr>
               <a:t>‹#›</a:t>
             </a:fld>
-            <a:endParaRPr lang="en-US"/>
+            <a:endParaRPr lang="en-US">
+              <a:solidFill>
+                <a:srgbClr val="111111"/>
+              </a:solidFill>
+            </a:endParaRPr>
           </a:p>
         </p:txBody>
       </p:sp>
     </p:spTree>
     <p:extLst>
       <p:ext uri="{BB962C8B-B14F-4D97-AF65-F5344CB8AC3E}">
-        <p14:creationId xmlns:p14="http://schemas.microsoft.com/office/powerpoint/2010/main" val="1840726560"/>
+        <p14:creationId xmlns:p14="http://schemas.microsoft.com/office/powerpoint/2010/main" val="3540895647"/>
       </p:ext>
     </p:extLst>
   </p:cSld>
@@ -2901,15 +3584,15 @@
         </p:nvSpPr>
         <p:spPr>
           <a:xfrm>
-            <a:off x="1792288" y="4800600"/>
-            <a:ext cx="5486400" cy="566738"/>
+            <a:off x="1792288" y="3600450"/>
+            <a:ext cx="5486400" cy="425054"/>
           </a:xfrm>
         </p:spPr>
         <p:txBody>
           <a:bodyPr anchor="b"/>
           <a:lstStyle>
             <a:lvl1pPr algn="l">
-              <a:defRPr sz="2000" b="1">
+              <a:defRPr sz="1500" b="1">
                 <a:solidFill>
                   <a:srgbClr val="111111"/>
                 </a:solidFill>
@@ -2918,14 +3601,13 @@
           </a:lstStyle>
           <a:p>
             <a:r>
-              <a:rPr lang="en-US" smtClean="0">
+              <a:rPr lang="en-US">
                 <a:solidFill>
                   <a:srgbClr val="111111"/>
                 </a:solidFill>
               </a:rPr>
               <a:t>Click to edit Master title style</a:t>
             </a:r>
-            <a:endParaRPr lang="en-US"/>
           </a:p>
         </p:txBody>
       </p:sp>
@@ -2941,8 +3623,8 @@
         </p:nvSpPr>
         <p:spPr>
           <a:xfrm>
-            <a:off x="1792288" y="612775"/>
-            <a:ext cx="5486400" cy="4114800"/>
+            <a:off x="1792288" y="459581"/>
+            <a:ext cx="5486400" cy="3086100"/>
           </a:xfrm>
         </p:spPr>
         <p:txBody>
@@ -2950,71 +3632,71 @@
           <a:lstStyle>
             <a:lvl1pPr marL="0" indent="0">
               <a:buNone/>
-              <a:defRPr sz="3200">
+              <a:defRPr sz="2400">
                 <a:solidFill>
                   <a:srgbClr val="111111"/>
                 </a:solidFill>
               </a:defRPr>
             </a:lvl1pPr>
-            <a:lvl2pPr marL="457200" indent="0">
-              <a:buNone/>
-              <a:defRPr sz="2800">
+            <a:lvl2pPr marL="342900" indent="0">
+              <a:buNone/>
+              <a:defRPr sz="2100">
                 <a:solidFill>
                   <a:srgbClr val="111111"/>
                 </a:solidFill>
               </a:defRPr>
             </a:lvl2pPr>
-            <a:lvl3pPr marL="914400" indent="0">
-              <a:buNone/>
-              <a:defRPr sz="2400">
+            <a:lvl3pPr marL="685800" indent="0">
+              <a:buNone/>
+              <a:defRPr sz="1800">
                 <a:solidFill>
                   <a:srgbClr val="111111"/>
                 </a:solidFill>
               </a:defRPr>
             </a:lvl3pPr>
-            <a:lvl4pPr marL="1371600" indent="0">
-              <a:buNone/>
-              <a:defRPr sz="2000">
+            <a:lvl4pPr marL="1028700" indent="0">
+              <a:buNone/>
+              <a:defRPr sz="1500">
                 <a:solidFill>
                   <a:srgbClr val="111111"/>
                 </a:solidFill>
               </a:defRPr>
             </a:lvl4pPr>
-            <a:lvl5pPr marL="1828800" indent="0">
-              <a:buNone/>
-              <a:defRPr sz="2000">
+            <a:lvl5pPr marL="1371600" indent="0">
+              <a:buNone/>
+              <a:defRPr sz="1500">
                 <a:solidFill>
                   <a:srgbClr val="111111"/>
                 </a:solidFill>
               </a:defRPr>
             </a:lvl5pPr>
-            <a:lvl6pPr marL="2286000" indent="0">
-              <a:buNone/>
-              <a:defRPr sz="2000">
+            <a:lvl6pPr marL="1714500" indent="0">
+              <a:buNone/>
+              <a:defRPr sz="1500">
                 <a:solidFill>
                   <a:srgbClr val="111111"/>
                 </a:solidFill>
               </a:defRPr>
             </a:lvl6pPr>
-            <a:lvl7pPr marL="2743200" indent="0">
-              <a:buNone/>
-              <a:defRPr sz="2000">
+            <a:lvl7pPr marL="2057400" indent="0">
+              <a:buNone/>
+              <a:defRPr sz="1500">
                 <a:solidFill>
                   <a:srgbClr val="111111"/>
                 </a:solidFill>
               </a:defRPr>
             </a:lvl7pPr>
-            <a:lvl8pPr marL="3200400" indent="0">
-              <a:buNone/>
-              <a:defRPr sz="2000">
+            <a:lvl8pPr marL="2400300" indent="0">
+              <a:buNone/>
+              <a:defRPr sz="1500">
                 <a:solidFill>
                   <a:srgbClr val="111111"/>
                 </a:solidFill>
               </a:defRPr>
             </a:lvl8pPr>
-            <a:lvl9pPr marL="3657600" indent="0">
-              <a:buNone/>
-              <a:defRPr sz="2000">
+            <a:lvl9pPr marL="2743200" indent="0">
+              <a:buNone/>
+              <a:defRPr sz="1500">
                 <a:solidFill>
                   <a:srgbClr val="111111"/>
                 </a:solidFill>
@@ -3022,7 +3704,11 @@
             </a:lvl9pPr>
           </a:lstStyle>
           <a:p>
-            <a:endParaRPr lang="en-US"/>
+            <a:endParaRPr lang="en-US">
+              <a:solidFill>
+                <a:srgbClr val="111111"/>
+              </a:solidFill>
+            </a:endParaRPr>
           </a:p>
         </p:txBody>
       </p:sp>
@@ -3038,8 +3724,8 @@
         </p:nvSpPr>
         <p:spPr>
           <a:xfrm>
-            <a:off x="1792288" y="5367338"/>
-            <a:ext cx="5486400" cy="804862"/>
+            <a:off x="1792288" y="4025503"/>
+            <a:ext cx="5486400" cy="603647"/>
           </a:xfrm>
         </p:spPr>
         <p:txBody>
@@ -3047,71 +3733,71 @@
           <a:lstStyle>
             <a:lvl1pPr marL="0" indent="0">
               <a:buNone/>
-              <a:defRPr sz="1400">
+              <a:defRPr sz="1050">
                 <a:solidFill>
                   <a:srgbClr val="111111"/>
                 </a:solidFill>
               </a:defRPr>
             </a:lvl1pPr>
-            <a:lvl2pPr marL="457200" indent="0">
-              <a:buNone/>
-              <a:defRPr sz="1200">
+            <a:lvl2pPr marL="342900" indent="0">
+              <a:buNone/>
+              <a:defRPr sz="900">
                 <a:solidFill>
                   <a:srgbClr val="111111"/>
                 </a:solidFill>
               </a:defRPr>
             </a:lvl2pPr>
-            <a:lvl3pPr marL="914400" indent="0">
-              <a:buNone/>
-              <a:defRPr sz="1000">
+            <a:lvl3pPr marL="685800" indent="0">
+              <a:buNone/>
+              <a:defRPr sz="750">
                 <a:solidFill>
                   <a:srgbClr val="111111"/>
                 </a:solidFill>
               </a:defRPr>
             </a:lvl3pPr>
-            <a:lvl4pPr marL="1371600" indent="0">
-              <a:buNone/>
-              <a:defRPr sz="900">
+            <a:lvl4pPr marL="1028700" indent="0">
+              <a:buNone/>
+              <a:defRPr sz="675">
                 <a:solidFill>
                   <a:srgbClr val="111111"/>
                 </a:solidFill>
               </a:defRPr>
             </a:lvl4pPr>
-            <a:lvl5pPr marL="1828800" indent="0">
-              <a:buNone/>
-              <a:defRPr sz="900">
+            <a:lvl5pPr marL="1371600" indent="0">
+              <a:buNone/>
+              <a:defRPr sz="675">
                 <a:solidFill>
                   <a:srgbClr val="111111"/>
                 </a:solidFill>
               </a:defRPr>
             </a:lvl5pPr>
-            <a:lvl6pPr marL="2286000" indent="0">
-              <a:buNone/>
-              <a:defRPr sz="900">
+            <a:lvl6pPr marL="1714500" indent="0">
+              <a:buNone/>
+              <a:defRPr sz="675">
                 <a:solidFill>
                   <a:srgbClr val="111111"/>
                 </a:solidFill>
               </a:defRPr>
             </a:lvl6pPr>
-            <a:lvl7pPr marL="2743200" indent="0">
-              <a:buNone/>
-              <a:defRPr sz="900">
+            <a:lvl7pPr marL="2057400" indent="0">
+              <a:buNone/>
+              <a:defRPr sz="675">
                 <a:solidFill>
                   <a:srgbClr val="111111"/>
                 </a:solidFill>
               </a:defRPr>
             </a:lvl7pPr>
-            <a:lvl8pPr marL="3200400" indent="0">
-              <a:buNone/>
-              <a:defRPr sz="900">
+            <a:lvl8pPr marL="2400300" indent="0">
+              <a:buNone/>
+              <a:defRPr sz="675">
                 <a:solidFill>
                   <a:srgbClr val="111111"/>
                 </a:solidFill>
               </a:defRPr>
             </a:lvl8pPr>
-            <a:lvl9pPr marL="3657600" indent="0">
-              <a:buNone/>
-              <a:defRPr sz="900">
+            <a:lvl9pPr marL="2743200" indent="0">
+              <a:buNone/>
+              <a:defRPr sz="675">
                 <a:solidFill>
                   <a:srgbClr val="111111"/>
                 </a:solidFill>
@@ -3121,24 +3807,55 @@
           <a:p>
             <a:pPr lvl="0"/>
             <a:r>
+              <a:rPr lang="en-US">
+                <a:solidFill>
+                  <a:srgbClr val="111111"/>
+                </a:solidFill>
+              </a:rPr>
+              <a:t>Click to edit Master text styles</a:t>
+            </a:r>
+          </a:p>
+        </p:txBody>
+      </p:sp>
+      <p:sp>
+        <p:nvSpPr>
+          <p:cNvPr id="5" name="Date Placeholder 4"/>
+          <p:cNvSpPr>
+            <a:spLocks noGrp="1"/>
+          </p:cNvSpPr>
+          <p:nvPr>
+            <p:ph type="dt" sz="half" idx="10"/>
+          </p:nvPr>
+        </p:nvSpPr>
+        <p:spPr/>
+        <p:txBody>
+          <a:bodyPr/>
+          <a:lstStyle/>
+          <a:p>
+            <a:fld id="{241EB5C9-1307-BA42-ABA2-0BC069CD8E7F}" type="datetimeFigureOut">
               <a:rPr lang="en-US" smtClean="0">
                 <a:solidFill>
                   <a:srgbClr val="111111"/>
                 </a:solidFill>
               </a:rPr>
-              <a:t>Click to edit Master text styles</a:t>
-            </a:r>
-          </a:p>
-        </p:txBody>
-      </p:sp>
-      <p:sp>
-        <p:nvSpPr>
-          <p:cNvPr id="5" name="Date Placeholder 4"/>
-          <p:cNvSpPr>
-            <a:spLocks noGrp="1"/>
-          </p:cNvSpPr>
-          <p:nvPr>
-            <p:ph type="dt" sz="half" idx="10"/>
+              <a:t>1/2/22</a:t>
+            </a:fld>
+            <a:endParaRPr lang="en-US">
+              <a:solidFill>
+                <a:srgbClr val="111111"/>
+              </a:solidFill>
+            </a:endParaRPr>
+          </a:p>
+        </p:txBody>
+      </p:sp>
+      <p:sp>
+        <p:nvSpPr>
+          <p:cNvPr id="6" name="Footer Placeholder 5"/>
+          <p:cNvSpPr>
+            <a:spLocks noGrp="1"/>
+          </p:cNvSpPr>
+          <p:nvPr>
+            <p:ph type="ftr" sz="quarter" idx="11"/>
           </p:nvPr>
         </p:nvSpPr>
         <p:spPr/>
@@ -3146,26 +3863,22 @@
           <a:bodyPr/>
           <a:lstStyle/>
           <a:p>
-            <a:fld id="{5BCAD085-E8A6-8845-BD4E-CB4CCA059FC4}" type="datetimeFigureOut">
-              <a:rPr lang="en-US" smtClean="0">
-                <a:solidFill>
-                  <a:srgbClr val="111111"/>
-                </a:solidFill>
-              </a:rPr>
-              <a:t>1/27/13</a:t>
-            </a:fld>
-            <a:endParaRPr lang="en-US"/>
-          </a:p>
-        </p:txBody>
-      </p:sp>
-      <p:sp>
-        <p:nvSpPr>
-          <p:cNvPr id="6" name="Footer Placeholder 5"/>
-          <p:cNvSpPr>
-            <a:spLocks noGrp="1"/>
-          </p:cNvSpPr>
-          <p:nvPr>
-            <p:ph type="ftr" sz="quarter" idx="11"/>
+            <a:endParaRPr lang="en-US">
+              <a:solidFill>
+                <a:srgbClr val="111111"/>
+              </a:solidFill>
+            </a:endParaRPr>
+          </a:p>
+        </p:txBody>
+      </p:sp>
+      <p:sp>
+        <p:nvSpPr>
+          <p:cNvPr id="7" name="Slide Number Placeholder 6"/>
+          <p:cNvSpPr>
+            <a:spLocks noGrp="1"/>
+          </p:cNvSpPr>
+          <p:nvPr>
+            <p:ph type="sldNum" sz="quarter" idx="12"/>
           </p:nvPr>
         </p:nvSpPr>
         <p:spPr/>
@@ -3173,26 +3886,7 @@
           <a:bodyPr/>
           <a:lstStyle/>
           <a:p>
-            <a:endParaRPr lang="en-US"/>
-          </a:p>
-        </p:txBody>
-      </p:sp>
-      <p:sp>
-        <p:nvSpPr>
-          <p:cNvPr id="7" name="Slide Number Placeholder 6"/>
-          <p:cNvSpPr>
-            <a:spLocks noGrp="1"/>
-          </p:cNvSpPr>
-          <p:nvPr>
-            <p:ph type="sldNum" sz="quarter" idx="12"/>
-          </p:nvPr>
-        </p:nvSpPr>
-        <p:spPr/>
-        <p:txBody>
-          <a:bodyPr/>
-          <a:lstStyle/>
-          <a:p>
-            <a:fld id="{C1FF6DA9-008F-8B48-92A6-B652298478BF}" type="slidenum">
+            <a:fld id="{C5EF2332-01BF-834F-8236-50238282D533}" type="slidenum">
               <a:rPr lang="en-US" smtClean="0">
                 <a:solidFill>
                   <a:srgbClr val="111111"/>
@@ -3200,14 +3894,18 @@
               </a:rPr>
               <a:t>‹#›</a:t>
             </a:fld>
-            <a:endParaRPr lang="en-US"/>
+            <a:endParaRPr lang="en-US">
+              <a:solidFill>
+                <a:srgbClr val="111111"/>
+              </a:solidFill>
+            </a:endParaRPr>
           </a:p>
         </p:txBody>
       </p:sp>
     </p:spTree>
     <p:extLst>
       <p:ext uri="{BB962C8B-B14F-4D97-AF65-F5344CB8AC3E}">
-        <p14:creationId xmlns:p14="http://schemas.microsoft.com/office/powerpoint/2010/main" val="3889236939"/>
+        <p14:creationId xmlns:p14="http://schemas.microsoft.com/office/powerpoint/2010/main" val="3566899855"/>
       </p:ext>
     </p:extLst>
   </p:cSld>
@@ -3221,12 +3919,9 @@
 <p:sldMaster xmlns:a="http://schemas.openxmlformats.org/drawingml/2006/main" xmlns:r="http://schemas.openxmlformats.org/officeDocument/2006/relationships" xmlns:p="http://schemas.openxmlformats.org/presentationml/2006/main">
   <p:cSld>
     <p:bg>
-      <p:bgPr>
-        <a:solidFill>
-          <a:srgbClr val="FFFFFF"/>
-        </a:solidFill>
-        <a:effectLst/>
-      </p:bgPr>
+      <p:bgRef idx="1001">
+        <a:schemeClr val="bg1"/>
+      </p:bgRef>
     </p:bg>
     <p:spTree>
       <p:nvGrpSpPr>
@@ -3254,8 +3949,8 @@
         </p:nvSpPr>
         <p:spPr>
           <a:xfrm>
-            <a:off x="457200" y="274638"/>
-            <a:ext cx="8229600" cy="1143000"/>
+            <a:off x="457200" y="205979"/>
+            <a:ext cx="8229600" cy="857250"/>
           </a:xfrm>
           <a:prstGeom prst="rect">
             <a:avLst/>
@@ -3268,14 +3963,13 @@
           <a:lstStyle/>
           <a:p>
             <a:r>
-              <a:rPr lang="en-US" smtClean="0">
+              <a:rPr lang="en-US">
                 <a:solidFill>
                   <a:srgbClr val="111111"/>
                 </a:solidFill>
               </a:rPr>
               <a:t>Click to edit Master title style</a:t>
             </a:r>
-            <a:endParaRPr lang="en-US"/>
           </a:p>
         </p:txBody>
       </p:sp>
@@ -3291,8 +3985,8 @@
         </p:nvSpPr>
         <p:spPr>
           <a:xfrm>
-            <a:off x="457200" y="1600200"/>
-            <a:ext cx="8229600" cy="4525963"/>
+            <a:off x="457200" y="1200151"/>
+            <a:ext cx="8229600" cy="3394472"/>
           </a:xfrm>
           <a:prstGeom prst="rect">
             <a:avLst/>
@@ -3306,7 +4000,7 @@
           <a:p>
             <a:pPr lvl="0"/>
             <a:r>
-              <a:rPr lang="en-US" smtClean="0">
+              <a:rPr lang="en-US">
                 <a:solidFill>
                   <a:srgbClr val="111111"/>
                 </a:solidFill>
@@ -3317,7 +4011,7 @@
           <a:p>
             <a:pPr lvl="1"/>
             <a:r>
-              <a:rPr lang="en-US" smtClean="0">
+              <a:rPr lang="en-US">
                 <a:solidFill>
                   <a:srgbClr val="111111"/>
                 </a:solidFill>
@@ -3328,7 +4022,7 @@
           <a:p>
             <a:pPr lvl="2"/>
             <a:r>
-              <a:rPr lang="en-US" smtClean="0">
+              <a:rPr lang="en-US">
                 <a:solidFill>
                   <a:srgbClr val="111111"/>
                 </a:solidFill>
@@ -3339,7 +4033,7 @@
           <a:p>
             <a:pPr lvl="3"/>
             <a:r>
-              <a:rPr lang="en-US" smtClean="0">
+              <a:rPr lang="en-US">
                 <a:solidFill>
                   <a:srgbClr val="111111"/>
                 </a:solidFill>
@@ -3350,14 +4044,13 @@
           <a:p>
             <a:pPr lvl="4"/>
             <a:r>
-              <a:rPr lang="en-US" smtClean="0">
+              <a:rPr lang="en-US">
                 <a:solidFill>
                   <a:srgbClr val="111111"/>
                 </a:solidFill>
               </a:rPr>
               <a:t>Fifth level</a:t>
             </a:r>
-            <a:endParaRPr lang="en-US"/>
           </a:p>
         </p:txBody>
       </p:sp>
@@ -3373,8 +4066,8 @@
         </p:nvSpPr>
         <p:spPr>
           <a:xfrm>
-            <a:off x="457200" y="6356350"/>
-            <a:ext cx="2133600" cy="365125"/>
+            <a:off x="457200" y="4767263"/>
+            <a:ext cx="2133600" cy="273844"/>
           </a:xfrm>
           <a:prstGeom prst="rect">
             <a:avLst/>
@@ -3384,7 +4077,7 @@
           <a:bodyPr vert="horz" lIns="91440" tIns="45720" rIns="91440" bIns="45720" rtlCol="0" anchor="ctr"/>
           <a:lstStyle>
             <a:lvl1pPr algn="l">
-              <a:defRPr sz="1200">
+              <a:defRPr sz="900">
                 <a:solidFill>
                   <a:srgbClr val="111111"/>
                 </a:solidFill>
@@ -3392,15 +4085,19 @@
             </a:lvl1pPr>
           </a:lstStyle>
           <a:p>
-            <a:fld id="{5BCAD085-E8A6-8845-BD4E-CB4CCA059FC4}" type="datetimeFigureOut">
+            <a:fld id="{241EB5C9-1307-BA42-ABA2-0BC069CD8E7F}" type="datetimeFigureOut">
               <a:rPr lang="en-US" smtClean="0">
                 <a:solidFill>
                   <a:srgbClr val="111111"/>
                 </a:solidFill>
               </a:rPr>
-              <a:t>1/27/13</a:t>
+              <a:t>1/2/22</a:t>
             </a:fld>
-            <a:endParaRPr lang="en-US"/>
+            <a:endParaRPr lang="en-US">
+              <a:solidFill>
+                <a:srgbClr val="111111"/>
+              </a:solidFill>
+            </a:endParaRPr>
           </a:p>
         </p:txBody>
       </p:sp>
@@ -3416,8 +4113,8 @@
         </p:nvSpPr>
         <p:spPr>
           <a:xfrm>
-            <a:off x="3124200" y="6356350"/>
-            <a:ext cx="2895600" cy="365125"/>
+            <a:off x="3124200" y="4767263"/>
+            <a:ext cx="2895600" cy="273844"/>
           </a:xfrm>
           <a:prstGeom prst="rect">
             <a:avLst/>
@@ -3427,7 +4124,7 @@
           <a:bodyPr vert="horz" lIns="91440" tIns="45720" rIns="91440" bIns="45720" rtlCol="0" anchor="ctr"/>
           <a:lstStyle>
             <a:lvl1pPr algn="ctr">
-              <a:defRPr sz="1200">
+              <a:defRPr sz="900">
                 <a:solidFill>
                   <a:srgbClr val="111111"/>
                 </a:solidFill>
@@ -3435,7 +4132,11 @@
             </a:lvl1pPr>
           </a:lstStyle>
           <a:p>
-            <a:endParaRPr lang="en-US"/>
+            <a:endParaRPr lang="en-US">
+              <a:solidFill>
+                <a:srgbClr val="111111"/>
+              </a:solidFill>
+            </a:endParaRPr>
           </a:p>
         </p:txBody>
       </p:sp>
@@ -3451,8 +4152,8 @@
         </p:nvSpPr>
         <p:spPr>
           <a:xfrm>
-            <a:off x="6553200" y="6356350"/>
-            <a:ext cx="2133600" cy="365125"/>
+            <a:off x="6553200" y="4767263"/>
+            <a:ext cx="2133600" cy="273844"/>
           </a:xfrm>
           <a:prstGeom prst="rect">
             <a:avLst/>
@@ -3462,7 +4163,7 @@
           <a:bodyPr vert="horz" lIns="91440" tIns="45720" rIns="91440" bIns="45720" rtlCol="0" anchor="ctr"/>
           <a:lstStyle>
             <a:lvl1pPr algn="r">
-              <a:defRPr sz="1200">
+              <a:defRPr sz="900">
                 <a:solidFill>
                   <a:srgbClr val="111111"/>
                 </a:solidFill>
@@ -3470,7 +4171,7 @@
             </a:lvl1pPr>
           </a:lstStyle>
           <a:p>
-            <a:fld id="{C1FF6DA9-008F-8B48-92A6-B652298478BF}" type="slidenum">
+            <a:fld id="{C5EF2332-01BF-834F-8236-50238282D533}" type="slidenum">
               <a:rPr lang="en-US" smtClean="0">
                 <a:solidFill>
                   <a:srgbClr val="111111"/>
@@ -3478,14 +4179,18 @@
               </a:rPr>
               <a:t>‹#›</a:t>
             </a:fld>
-            <a:endParaRPr lang="en-US"/>
+            <a:endParaRPr lang="en-US">
+              <a:solidFill>
+                <a:srgbClr val="111111"/>
+              </a:solidFill>
+            </a:endParaRPr>
           </a:p>
         </p:txBody>
       </p:sp>
     </p:spTree>
     <p:extLst>
       <p:ext uri="{BB962C8B-B14F-4D97-AF65-F5344CB8AC3E}">
-        <p14:creationId xmlns:p14="http://schemas.microsoft.com/office/powerpoint/2010/main" val="2209977519"/>
+        <p14:creationId xmlns:p14="http://schemas.microsoft.com/office/powerpoint/2010/main" val="3676200875"/>
       </p:ext>
     </p:extLst>
   </p:cSld>
@@ -3505,12 +4210,12 @@
   </p:sldLayoutIdLst>
   <p:txStyles>
     <p:titleStyle>
-      <a:lvl1pPr algn="ctr" defTabSz="457200" rtl="0" eaLnBrk="1" latinLnBrk="0" hangingPunct="1">
+      <a:lvl1pPr algn="ctr" defTabSz="342900" rtl="0" eaLnBrk="1" latinLnBrk="0" hangingPunct="1">
         <a:spcBef>
           <a:spcPct val="0"/>
         </a:spcBef>
         <a:buNone/>
-        <a:defRPr sz="4400" kern="1200">
+        <a:defRPr sz="3300" kern="1200">
           <a:latin typeface="Cambria"/>
           <a:ea typeface="+mj-ea"/>
           <a:cs typeface="+mj-cs"/>
@@ -3521,37 +4226,7 @@
       </a:lvl1pPr>
     </p:titleStyle>
     <p:bodyStyle>
-      <a:lvl1pPr marL="342900" indent="-342900" algn="l" defTabSz="457200" rtl="0" eaLnBrk="1" latinLnBrk="0" hangingPunct="1">
-        <a:spcBef>
-          <a:spcPct val="20000"/>
-        </a:spcBef>
-        <a:buFont typeface="Arial"/>
-        <a:buChar char="•"/>
-        <a:defRPr sz="3200" kern="1200">
-          <a:latin typeface="Cambria"/>
-          <a:ea typeface="+mn-ea"/>
-          <a:cs typeface="+mn-cs"/>
-          <a:solidFill>
-            <a:srgbClr val="111111"/>
-          </a:solidFill>
-        </a:defRPr>
-      </a:lvl1pPr>
-      <a:lvl2pPr marL="742950" indent="-285750" algn="l" defTabSz="457200" rtl="0" eaLnBrk="1" latinLnBrk="0" hangingPunct="1">
-        <a:spcBef>
-          <a:spcPct val="20000"/>
-        </a:spcBef>
-        <a:buFont typeface="Arial"/>
-        <a:buChar char="–"/>
-        <a:defRPr sz="2800" kern="1200">
-          <a:latin typeface="Cambria"/>
-          <a:ea typeface="+mn-ea"/>
-          <a:cs typeface="+mn-cs"/>
-          <a:solidFill>
-            <a:srgbClr val="111111"/>
-          </a:solidFill>
-        </a:defRPr>
-      </a:lvl2pPr>
-      <a:lvl3pPr marL="1143000" indent="-228600" algn="l" defTabSz="457200" rtl="0" eaLnBrk="1" latinLnBrk="0" hangingPunct="1">
+      <a:lvl1pPr marL="342900" indent="-342900" algn="l" defTabSz="342900" rtl="0" eaLnBrk="1" latinLnBrk="0" hangingPunct="1">
         <a:spcBef>
           <a:spcPct val="20000"/>
         </a:spcBef>
@@ -3565,14 +4240,44 @@
             <a:srgbClr val="111111"/>
           </a:solidFill>
         </a:defRPr>
-      </a:lvl3pPr>
-      <a:lvl4pPr marL="1600200" indent="-228600" algn="l" defTabSz="457200" rtl="0" eaLnBrk="1" latinLnBrk="0" hangingPunct="1">
+      </a:lvl1pPr>
+      <a:lvl2pPr marL="685800" indent="-342900" algn="l" defTabSz="342900" rtl="0" eaLnBrk="1" latinLnBrk="0" hangingPunct="1">
         <a:spcBef>
           <a:spcPct val="20000"/>
         </a:spcBef>
         <a:buFont typeface="Arial"/>
         <a:buChar char="–"/>
-        <a:defRPr sz="2000" kern="1200">
+        <a:defRPr sz="2100" kern="1200">
+          <a:latin typeface="Cambria"/>
+          <a:ea typeface="+mn-ea"/>
+          <a:cs typeface="+mn-cs"/>
+          <a:solidFill>
+            <a:srgbClr val="111111"/>
+          </a:solidFill>
+        </a:defRPr>
+      </a:lvl2pPr>
+      <a:lvl3pPr marL="1028700" indent="-342900" algn="l" defTabSz="342900" rtl="0" eaLnBrk="1" latinLnBrk="0" hangingPunct="1">
+        <a:spcBef>
+          <a:spcPct val="20000"/>
+        </a:spcBef>
+        <a:buFont typeface="Arial"/>
+        <a:buChar char="•"/>
+        <a:defRPr sz="1800" kern="1200">
+          <a:latin typeface="Cambria"/>
+          <a:ea typeface="+mn-ea"/>
+          <a:cs typeface="+mn-cs"/>
+          <a:solidFill>
+            <a:srgbClr val="111111"/>
+          </a:solidFill>
+        </a:defRPr>
+      </a:lvl3pPr>
+      <a:lvl4pPr marL="1371600" indent="-342900" algn="l" defTabSz="342900" rtl="0" eaLnBrk="1" latinLnBrk="0" hangingPunct="1">
+        <a:spcBef>
+          <a:spcPct val="20000"/>
+        </a:spcBef>
+        <a:buFont typeface="Arial"/>
+        <a:buChar char="–"/>
+        <a:defRPr sz="1500" kern="1200">
           <a:latin typeface="Cambria"/>
           <a:ea typeface="+mn-ea"/>
           <a:cs typeface="+mn-cs"/>
@@ -3581,13 +4286,13 @@
           </a:solidFill>
         </a:defRPr>
       </a:lvl4pPr>
-      <a:lvl5pPr marL="2057400" indent="-228600" algn="l" defTabSz="457200" rtl="0" eaLnBrk="1" latinLnBrk="0" hangingPunct="1">
+      <a:lvl5pPr marL="1714500" indent="-342900" algn="l" defTabSz="342900" rtl="0" eaLnBrk="1" latinLnBrk="0" hangingPunct="1">
         <a:spcBef>
           <a:spcPct val="20000"/>
         </a:spcBef>
         <a:buFont typeface="Arial"/>
         <a:buChar char="»"/>
-        <a:defRPr sz="2000" kern="1200">
+        <a:defRPr sz="1500" kern="1200">
           <a:latin typeface="Cambria"/>
           <a:ea typeface="+mn-ea"/>
           <a:cs typeface="+mn-cs"/>
@@ -3596,13 +4301,13 @@
           </a:solidFill>
         </a:defRPr>
       </a:lvl5pPr>
-      <a:lvl6pPr marL="2514600" indent="-228600" algn="l" defTabSz="457200" rtl="0" eaLnBrk="1" latinLnBrk="0" hangingPunct="1">
+      <a:lvl6pPr marL="2057400" indent="-342900" algn="l" defTabSz="342900" rtl="0" eaLnBrk="1" latinLnBrk="0" hangingPunct="1">
         <a:spcBef>
           <a:spcPct val="20000"/>
         </a:spcBef>
         <a:buFont typeface="Arial"/>
         <a:buChar char="•"/>
-        <a:defRPr sz="2000" kern="1200">
+        <a:defRPr sz="1500" kern="1200">
           <a:latin typeface="Cambria"/>
           <a:ea typeface="+mn-ea"/>
           <a:cs typeface="+mn-cs"/>
@@ -3611,13 +4316,13 @@
           </a:solidFill>
         </a:defRPr>
       </a:lvl6pPr>
-      <a:lvl7pPr marL="2971800" indent="-228600" algn="l" defTabSz="457200" rtl="0" eaLnBrk="1" latinLnBrk="0" hangingPunct="1">
+      <a:lvl7pPr marL="2400300" indent="-342900" algn="l" defTabSz="342900" rtl="0" eaLnBrk="1" latinLnBrk="0" hangingPunct="1">
         <a:spcBef>
           <a:spcPct val="20000"/>
         </a:spcBef>
         <a:buFont typeface="Arial"/>
         <a:buChar char="•"/>
-        <a:defRPr sz="2000" kern="1200">
+        <a:defRPr sz="1500" kern="1200">
           <a:latin typeface="Cambria"/>
           <a:ea typeface="+mn-ea"/>
           <a:cs typeface="+mn-cs"/>
@@ -3626,13 +4331,13 @@
           </a:solidFill>
         </a:defRPr>
       </a:lvl7pPr>
-      <a:lvl8pPr marL="3429000" indent="-228600" algn="l" defTabSz="457200" rtl="0" eaLnBrk="1" latinLnBrk="0" hangingPunct="1">
+      <a:lvl8pPr marL="2743200" indent="-342900" algn="l" defTabSz="342900" rtl="0" eaLnBrk="1" latinLnBrk="0" hangingPunct="1">
         <a:spcBef>
           <a:spcPct val="20000"/>
         </a:spcBef>
         <a:buFont typeface="Arial"/>
         <a:buChar char="•"/>
-        <a:defRPr sz="2000" kern="1200">
+        <a:defRPr sz="1500" kern="1200">
           <a:latin typeface="Cambria"/>
           <a:ea typeface="+mn-ea"/>
           <a:cs typeface="+mn-cs"/>
@@ -3641,13 +4346,13 @@
           </a:solidFill>
         </a:defRPr>
       </a:lvl8pPr>
-      <a:lvl9pPr marL="3886200" indent="-228600" algn="l" defTabSz="457200" rtl="0" eaLnBrk="1" latinLnBrk="0" hangingPunct="1">
+      <a:lvl9pPr marL="3086100" indent="-342900" algn="l" defTabSz="342900" rtl="0" eaLnBrk="1" latinLnBrk="0" hangingPunct="1">
         <a:spcBef>
           <a:spcPct val="20000"/>
         </a:spcBef>
         <a:buFont typeface="Arial"/>
         <a:buChar char="•"/>
-        <a:defRPr sz="2000" kern="1200">
+        <a:defRPr sz="1500" kern="1200">
           <a:latin typeface="Cambria"/>
           <a:ea typeface="+mn-ea"/>
           <a:cs typeface="+mn-cs"/>
@@ -3665,8 +4370,8 @@
           </a:solidFill>
         </a:defRPr>
       </a:defPPr>
-      <a:lvl1pPr marL="0" algn="l" defTabSz="457200" rtl="0" eaLnBrk="1" latinLnBrk="0" hangingPunct="1">
-        <a:defRPr sz="1800" kern="1200">
+      <a:lvl1pPr marL="0" algn="l" defTabSz="342900" rtl="0" eaLnBrk="1" latinLnBrk="0" hangingPunct="1">
+        <a:defRPr sz="1350" kern="1200">
           <a:latin typeface="Cambria"/>
           <a:ea typeface="+mn-ea"/>
           <a:cs typeface="+mn-cs"/>
@@ -3675,8 +4380,8 @@
           </a:solidFill>
         </a:defRPr>
       </a:lvl1pPr>
-      <a:lvl2pPr marL="457200" algn="l" defTabSz="457200" rtl="0" eaLnBrk="1" latinLnBrk="0" hangingPunct="1">
-        <a:defRPr sz="1800" kern="1200">
+      <a:lvl2pPr marL="342900" algn="l" defTabSz="342900" rtl="0" eaLnBrk="1" latinLnBrk="0" hangingPunct="1">
+        <a:defRPr sz="1350" kern="1200">
           <a:latin typeface="Cambria"/>
           <a:ea typeface="+mn-ea"/>
           <a:cs typeface="+mn-cs"/>
@@ -3685,8 +4390,8 @@
           </a:solidFill>
         </a:defRPr>
       </a:lvl2pPr>
-      <a:lvl3pPr marL="914400" algn="l" defTabSz="457200" rtl="0" eaLnBrk="1" latinLnBrk="0" hangingPunct="1">
-        <a:defRPr sz="1800" kern="1200">
+      <a:lvl3pPr marL="685800" algn="l" defTabSz="342900" rtl="0" eaLnBrk="1" latinLnBrk="0" hangingPunct="1">
+        <a:defRPr sz="1350" kern="1200">
           <a:latin typeface="Cambria"/>
           <a:ea typeface="+mn-ea"/>
           <a:cs typeface="+mn-cs"/>
@@ -3695,8 +4400,8 @@
           </a:solidFill>
         </a:defRPr>
       </a:lvl3pPr>
-      <a:lvl4pPr marL="1371600" algn="l" defTabSz="457200" rtl="0" eaLnBrk="1" latinLnBrk="0" hangingPunct="1">
-        <a:defRPr sz="1800" kern="1200">
+      <a:lvl4pPr marL="1028700" algn="l" defTabSz="342900" rtl="0" eaLnBrk="1" latinLnBrk="0" hangingPunct="1">
+        <a:defRPr sz="1350" kern="1200">
           <a:latin typeface="Cambria"/>
           <a:ea typeface="+mn-ea"/>
           <a:cs typeface="+mn-cs"/>
@@ -3705,8 +4410,8 @@
           </a:solidFill>
         </a:defRPr>
       </a:lvl4pPr>
-      <a:lvl5pPr marL="1828800" algn="l" defTabSz="457200" rtl="0" eaLnBrk="1" latinLnBrk="0" hangingPunct="1">
-        <a:defRPr sz="1800" kern="1200">
+      <a:lvl5pPr marL="1371600" algn="l" defTabSz="342900" rtl="0" eaLnBrk="1" latinLnBrk="0" hangingPunct="1">
+        <a:defRPr sz="1350" kern="1200">
           <a:latin typeface="Cambria"/>
           <a:ea typeface="+mn-ea"/>
           <a:cs typeface="+mn-cs"/>
@@ -3715,8 +4420,8 @@
           </a:solidFill>
         </a:defRPr>
       </a:lvl5pPr>
-      <a:lvl6pPr marL="2286000" algn="l" defTabSz="457200" rtl="0" eaLnBrk="1" latinLnBrk="0" hangingPunct="1">
-        <a:defRPr sz="1800" kern="1200">
+      <a:lvl6pPr marL="1714500" algn="l" defTabSz="342900" rtl="0" eaLnBrk="1" latinLnBrk="0" hangingPunct="1">
+        <a:defRPr sz="1350" kern="1200">
           <a:latin typeface="Cambria"/>
           <a:ea typeface="+mn-ea"/>
           <a:cs typeface="+mn-cs"/>
@@ -3725,8 +4430,8 @@
           </a:solidFill>
         </a:defRPr>
       </a:lvl6pPr>
-      <a:lvl7pPr marL="2743200" algn="l" defTabSz="457200" rtl="0" eaLnBrk="1" latinLnBrk="0" hangingPunct="1">
-        <a:defRPr sz="1800" kern="1200">
+      <a:lvl7pPr marL="2057400" algn="l" defTabSz="342900" rtl="0" eaLnBrk="1" latinLnBrk="0" hangingPunct="1">
+        <a:defRPr sz="1350" kern="1200">
           <a:latin typeface="Cambria"/>
           <a:ea typeface="+mn-ea"/>
           <a:cs typeface="+mn-cs"/>
@@ -3735,8 +4440,8 @@
           </a:solidFill>
         </a:defRPr>
       </a:lvl7pPr>
-      <a:lvl8pPr marL="3200400" algn="l" defTabSz="457200" rtl="0" eaLnBrk="1" latinLnBrk="0" hangingPunct="1">
-        <a:defRPr sz="1800" kern="1200">
+      <a:lvl8pPr marL="2400300" algn="l" defTabSz="342900" rtl="0" eaLnBrk="1" latinLnBrk="0" hangingPunct="1">
+        <a:defRPr sz="1350" kern="1200">
           <a:latin typeface="Cambria"/>
           <a:ea typeface="+mn-ea"/>
           <a:cs typeface="+mn-cs"/>
@@ -3745,8 +4450,8 @@
           </a:solidFill>
         </a:defRPr>
       </a:lvl8pPr>
-      <a:lvl9pPr marL="3657600" algn="l" defTabSz="457200" rtl="0" eaLnBrk="1" latinLnBrk="0" hangingPunct="1">
-        <a:defRPr sz="1800" kern="1200">
+      <a:lvl9pPr marL="2743200" algn="l" defTabSz="342900" rtl="0" eaLnBrk="1" latinLnBrk="0" hangingPunct="1">
+        <a:defRPr sz="1350" kern="1200">
           <a:latin typeface="Cambria"/>
           <a:ea typeface="+mn-ea"/>
           <a:cs typeface="+mn-cs"/>
@@ -3758,6 +4463,332 @@
     </p:otherStyle>
   </p:txStyles>
 </p:sldMaster>
+</file>
+
+<file path=ppt/slides/slide1.xml><?xml version="1.0" encoding="utf-8"?>
+<p:sld xmlns:a="http://schemas.openxmlformats.org/drawingml/2006/main" xmlns:r="http://schemas.openxmlformats.org/officeDocument/2006/relationships" xmlns:p="http://schemas.openxmlformats.org/presentationml/2006/main">
+  <p:cSld>
+    <p:spTree>
+      <p:nvGrpSpPr>
+        <p:cNvPr id="1" name=""/>
+        <p:cNvGrpSpPr/>
+        <p:nvPr/>
+      </p:nvGrpSpPr>
+      <p:grpSpPr>
+        <a:xfrm>
+          <a:off x="0" y="0"/>
+          <a:ext cx="0" cy="0"/>
+          <a:chOff x="0" y="0"/>
+          <a:chExt cx="0" cy="0"/>
+        </a:xfrm>
+      </p:grpSpPr>
+      <p:sp>
+        <p:nvSpPr>
+          <p:cNvPr id="2" name="Title 1"/>
+          <p:cNvSpPr>
+            <a:spLocks noGrp="1"/>
+          </p:cNvSpPr>
+          <p:nvPr>
+            <p:ph type="ctrTitle"/>
+          </p:nvPr>
+        </p:nvSpPr>
+        <p:spPr/>
+        <p:txBody>
+          <a:bodyPr/>
+          <a:lstStyle/>
+          <a:p>
+            <a:r>
+              <a:rPr lang="en-US" dirty="0"/>
+              <a:t>Presentation Title</a:t>
+            </a:r>
+          </a:p>
+        </p:txBody>
+      </p:sp>
+      <p:sp>
+        <p:nvSpPr>
+          <p:cNvPr id="3" name="Subtitle 2"/>
+          <p:cNvSpPr>
+            <a:spLocks noGrp="1"/>
+          </p:cNvSpPr>
+          <p:nvPr>
+            <p:ph type="subTitle" idx="1"/>
+          </p:nvPr>
+        </p:nvSpPr>
+        <p:spPr/>
+        <p:txBody>
+          <a:bodyPr/>
+          <a:lstStyle/>
+          <a:p>
+            <a:r>
+              <a:rPr lang="en-US" dirty="0"/>
+              <a:t>Presentation Subtitle</a:t>
+            </a:r>
+          </a:p>
+        </p:txBody>
+      </p:sp>
+    </p:spTree>
+    <p:extLst>
+      <p:ext uri="{BB962C8B-B14F-4D97-AF65-F5344CB8AC3E}">
+        <p14:creationId xmlns:p14="http://schemas.microsoft.com/office/powerpoint/2010/main" val="392669009"/>
+      </p:ext>
+    </p:extLst>
+  </p:cSld>
+  <p:clrMapOvr>
+    <a:masterClrMapping/>
+  </p:clrMapOvr>
+</p:sld>
+</file>
+
+<file path=ppt/slides/slide2.xml><?xml version="1.0" encoding="utf-8"?>
+<p:sld xmlns:a="http://schemas.openxmlformats.org/drawingml/2006/main" xmlns:r="http://schemas.openxmlformats.org/officeDocument/2006/relationships" xmlns:p="http://schemas.openxmlformats.org/presentationml/2006/main">
+  <p:cSld>
+    <p:spTree>
+      <p:nvGrpSpPr>
+        <p:cNvPr id="1" name=""/>
+        <p:cNvGrpSpPr/>
+        <p:nvPr/>
+      </p:nvGrpSpPr>
+      <p:grpSpPr>
+        <a:xfrm>
+          <a:off x="0" y="0"/>
+          <a:ext cx="0" cy="0"/>
+          <a:chOff x="0" y="0"/>
+          <a:chExt cx="0" cy="0"/>
+        </a:xfrm>
+      </p:grpSpPr>
+      <p:sp>
+        <p:nvSpPr>
+          <p:cNvPr id="2" name="Title 1"/>
+          <p:cNvSpPr>
+            <a:spLocks noGrp="1"/>
+          </p:cNvSpPr>
+          <p:nvPr>
+            <p:ph type="title"/>
+          </p:nvPr>
+        </p:nvSpPr>
+        <p:spPr/>
+        <p:txBody>
+          <a:bodyPr/>
+          <a:lstStyle/>
+          <a:p>
+            <a:r>
+              <a:rPr lang="en-US" dirty="0"/>
+              <a:t>Slide Title</a:t>
+            </a:r>
+          </a:p>
+        </p:txBody>
+      </p:sp>
+      <p:sp>
+        <p:nvSpPr>
+          <p:cNvPr id="3" name="Content Placeholder 2"/>
+          <p:cNvSpPr>
+            <a:spLocks noGrp="1"/>
+          </p:cNvSpPr>
+          <p:nvPr>
+            <p:ph idx="1"/>
+          </p:nvPr>
+        </p:nvSpPr>
+        <p:spPr/>
+        <p:txBody>
+          <a:bodyPr/>
+          <a:lstStyle/>
+          <a:p>
+            <a:pPr marL="0" indent="0">
+              <a:buNone/>
+            </a:pPr>
+            <a:r>
+              <a:rPr lang="en-US" dirty="0"/>
+              <a:t>Hello</a:t>
+            </a:r>
+            <a:r>
+              <a:rPr lang="en-US"/>
+              <a:t>, world.</a:t>
+            </a:r>
+          </a:p>
+        </p:txBody>
+      </p:sp>
+    </p:spTree>
+    <p:extLst>
+      <p:ext uri="{BB962C8B-B14F-4D97-AF65-F5344CB8AC3E}">
+        <p14:creationId xmlns:p14="http://schemas.microsoft.com/office/powerpoint/2010/main" val="572707455"/>
+      </p:ext>
+    </p:extLst>
+  </p:cSld>
+  <p:clrMapOvr>
+    <a:masterClrMapping/>
+  </p:clrMapOvr>
+</p:sld>
+</file>
+
+<file path=ppt/slides/slide3.xml><?xml version="1.0" encoding="utf-8"?>
+<p:sld xmlns:a="http://schemas.openxmlformats.org/drawingml/2006/main" xmlns:r="http://schemas.openxmlformats.org/officeDocument/2006/relationships" xmlns:p="http://schemas.openxmlformats.org/presentationml/2006/main">
+  <p:cSld>
+    <p:spTree>
+      <p:nvGrpSpPr>
+        <p:cNvPr id="1" name=""/>
+        <p:cNvGrpSpPr/>
+        <p:nvPr/>
+      </p:nvGrpSpPr>
+      <p:grpSpPr>
+        <a:xfrm>
+          <a:off x="0" y="0"/>
+          <a:ext cx="0" cy="0"/>
+          <a:chOff x="0" y="0"/>
+          <a:chExt cx="0" cy="0"/>
+        </a:xfrm>
+      </p:grpSpPr>
+      <p:sp>
+        <p:nvSpPr>
+          <p:cNvPr id="2" name="Title 1"/>
+          <p:cNvSpPr>
+            <a:spLocks noGrp="1"/>
+          </p:cNvSpPr>
+          <p:nvPr>
+            <p:ph type="title"/>
+          </p:nvPr>
+        </p:nvSpPr>
+        <p:spPr/>
+        <p:txBody>
+          <a:bodyPr/>
+          <a:lstStyle/>
+          <a:p>
+            <a:r>
+              <a:rPr lang="en-US" dirty="0"/>
+              <a:t>Section header</a:t>
+            </a:r>
+          </a:p>
+        </p:txBody>
+      </p:sp>
+      <p:sp>
+        <p:nvSpPr>
+          <p:cNvPr id="3" name="Text Placeholder 2"/>
+          <p:cNvSpPr>
+            <a:spLocks noGrp="1"/>
+          </p:cNvSpPr>
+          <p:nvPr>
+            <p:ph type="body" idx="1"/>
+          </p:nvPr>
+        </p:nvSpPr>
+        <p:spPr/>
+      </p:sp>
+    </p:spTree>
+    <p:extLst>
+      <p:ext uri="{BB962C8B-B14F-4D97-AF65-F5344CB8AC3E}">
+        <p14:creationId xmlns:p14="http://schemas.microsoft.com/office/powerpoint/2010/main" val="3996781534"/>
+      </p:ext>
+    </p:extLst>
+  </p:cSld>
+  <p:clrMapOvr>
+    <a:masterClrMapping/>
+  </p:clrMapOvr>
+</p:sld>
+</file>
+
+<file path=ppt/slides/slide4.xml><?xml version="1.0" encoding="utf-8"?>
+<p:sld xmlns:a="http://schemas.openxmlformats.org/drawingml/2006/main" xmlns:r="http://schemas.openxmlformats.org/officeDocument/2006/relationships" xmlns:p="http://schemas.openxmlformats.org/presentationml/2006/main">
+  <p:cSld>
+    <p:spTree>
+      <p:nvGrpSpPr>
+        <p:cNvPr id="1" name=""/>
+        <p:cNvGrpSpPr/>
+        <p:nvPr/>
+      </p:nvGrpSpPr>
+      <p:grpSpPr>
+        <a:xfrm>
+          <a:off x="0" y="0"/>
+          <a:ext cx="0" cy="0"/>
+          <a:chOff x="0" y="0"/>
+          <a:chExt cx="0" cy="0"/>
+        </a:xfrm>
+      </p:grpSpPr>
+      <p:sp>
+        <p:nvSpPr>
+          <p:cNvPr id="4" name="Title 3"/>
+          <p:cNvSpPr>
+            <a:spLocks noGrp="1"/>
+          </p:cNvSpPr>
+          <p:nvPr>
+            <p:ph type="title"/>
+          </p:nvPr>
+        </p:nvSpPr>
+        <p:spPr/>
+        <p:txBody>
+          <a:bodyPr/>
+          <a:lstStyle/>
+          <a:p>
+            <a:r>
+              <a:rPr lang="en-US" dirty="0"/>
+              <a:t>Slide Title for Two-Content</a:t>
+            </a:r>
+          </a:p>
+        </p:txBody>
+      </p:sp>
+      <p:sp>
+        <p:nvSpPr>
+          <p:cNvPr id="5" name="Content Placeholder 4"/>
+          <p:cNvSpPr>
+            <a:spLocks noGrp="1"/>
+          </p:cNvSpPr>
+          <p:nvPr>
+            <p:ph sz="half" idx="1"/>
+          </p:nvPr>
+        </p:nvSpPr>
+        <p:spPr/>
+        <p:txBody>
+          <a:bodyPr/>
+          <a:lstStyle/>
+          <a:p>
+            <a:r>
+              <a:rPr lang="en-US" dirty="0"/>
+              <a:t>Some content on </a:t>
+            </a:r>
+            <a:r>
+              <a:rPr lang="en-US"/>
+              <a:t>the left.</a:t>
+            </a:r>
+            <a:endParaRPr lang="en-US" dirty="0"/>
+          </a:p>
+          <a:p>
+            <a:pPr marL="0" indent="0">
+              <a:buNone/>
+            </a:pPr>
+            <a:endParaRPr lang="en-US" dirty="0"/>
+          </a:p>
+        </p:txBody>
+      </p:sp>
+      <p:sp>
+        <p:nvSpPr>
+          <p:cNvPr id="6" name="Content Placeholder 5"/>
+          <p:cNvSpPr>
+            <a:spLocks noGrp="1"/>
+          </p:cNvSpPr>
+          <p:nvPr>
+            <p:ph sz="half" idx="2"/>
+          </p:nvPr>
+        </p:nvSpPr>
+        <p:spPr/>
+        <p:txBody>
+          <a:bodyPr/>
+          <a:lstStyle/>
+          <a:p>
+            <a:r>
+              <a:rPr lang="en-US" dirty="0"/>
+              <a:t>Some content on the right.</a:t>
+            </a:r>
+          </a:p>
+        </p:txBody>
+      </p:sp>
+    </p:spTree>
+    <p:extLst>
+      <p:ext uri="{BB962C8B-B14F-4D97-AF65-F5344CB8AC3E}">
+        <p14:creationId xmlns:p14="http://schemas.microsoft.com/office/powerpoint/2010/main" val="1324621109"/>
+      </p:ext>
+    </p:extLst>
+  </p:cSld>
+  <p:clrMapOvr>
+    <a:masterClrMapping/>
+  </p:clrMapOvr>
+</p:sld>
 </file>
 
 <file path=ppt/theme/theme1.xml><?xml version="1.0" encoding="utf-8"?>
@@ -4078,4 +5109,265 @@
   </a:objectDefaults>
   <a:extraClrSchemeLst/>
 </a:theme>
+</file>
+
+<file path=ppt/theme/theme2.xml><?xml version="1.0" encoding="utf-8"?>
+<a:theme xmlns:a="http://schemas.openxmlformats.org/drawingml/2006/main" name="Office Theme">
+  <a:themeElements>
+    <a:clrScheme name="Office">
+      <a:dk1>
+        <a:sysClr val="windowText" lastClr="000000"/>
+      </a:dk1>
+      <a:lt1>
+        <a:sysClr val="window" lastClr="FFFFFF"/>
+      </a:lt1>
+      <a:dk2>
+        <a:srgbClr val="44546A"/>
+      </a:dk2>
+      <a:lt2>
+        <a:srgbClr val="E7E6E6"/>
+      </a:lt2>
+      <a:accent1>
+        <a:srgbClr val="5B9BD5"/>
+      </a:accent1>
+      <a:accent2>
+        <a:srgbClr val="ED7D31"/>
+      </a:accent2>
+      <a:accent3>
+        <a:srgbClr val="A5A5A5"/>
+      </a:accent3>
+      <a:accent4>
+        <a:srgbClr val="FFC000"/>
+      </a:accent4>
+      <a:accent5>
+        <a:srgbClr val="4472C4"/>
+      </a:accent5>
+      <a:accent6>
+        <a:srgbClr val="70AD47"/>
+      </a:accent6>
+      <a:hlink>
+        <a:srgbClr val="0563C1"/>
+      </a:hlink>
+      <a:folHlink>
+        <a:srgbClr val="954F72"/>
+      </a:folHlink>
+    </a:clrScheme>
+    <a:fontScheme name="Office">
+      <a:majorFont>
+        <a:latin typeface="Calibri Light" panose="020F0302020204030204"/>
+        <a:ea typeface=""/>
+        <a:cs typeface=""/>
+        <a:font script="Jpan" typeface="ＭＳ Ｐゴシック"/>
+        <a:font script="Hang" typeface="맑은 고딕"/>
+        <a:font script="Hans" typeface="宋体"/>
+        <a:font script="Hant" typeface="新細明體"/>
+        <a:font script="Arab" typeface="Times New Roman"/>
+        <a:font script="Hebr" typeface="Times New Roman"/>
+        <a:font script="Thai" typeface="Angsana New"/>
+        <a:font script="Ethi" typeface="Nyala"/>
+        <a:font script="Beng" typeface="Vrinda"/>
+        <a:font script="Gujr" typeface="Shruti"/>
+        <a:font script="Khmr" typeface="MoolBoran"/>
+        <a:font script="Knda" typeface="Tunga"/>
+        <a:font script="Guru" typeface="Raavi"/>
+        <a:font script="Cans" typeface="Euphemia"/>
+        <a:font script="Cher" typeface="Plantagenet Cherokee"/>
+        <a:font script="Yiii" typeface="Microsoft Yi Baiti"/>
+        <a:font script="Tibt" typeface="Microsoft Himalaya"/>
+        <a:font script="Thaa" typeface="MV Boli"/>
+        <a:font script="Deva" typeface="Mangal"/>
+        <a:font script="Telu" typeface="Gautami"/>
+        <a:font script="Taml" typeface="Latha"/>
+        <a:font script="Syrc" typeface="Estrangelo Edessa"/>
+        <a:font script="Orya" typeface="Kalinga"/>
+        <a:font script="Mlym" typeface="Kartika"/>
+        <a:font script="Laoo" typeface="DokChampa"/>
+        <a:font script="Sinh" typeface="Iskoola Pota"/>
+        <a:font script="Mong" typeface="Mongolian Baiti"/>
+        <a:font script="Viet" typeface="Times New Roman"/>
+        <a:font script="Uigh" typeface="Microsoft Uighur"/>
+        <a:font script="Geor" typeface="Sylfaen"/>
+      </a:majorFont>
+      <a:minorFont>
+        <a:latin typeface="Calibri" panose="020F0502020204030204"/>
+        <a:ea typeface=""/>
+        <a:cs typeface=""/>
+        <a:font script="Jpan" typeface="ＭＳ Ｐゴシック"/>
+        <a:font script="Hang" typeface="맑은 고딕"/>
+        <a:font script="Hans" typeface="宋体"/>
+        <a:font script="Hant" typeface="新細明體"/>
+        <a:font script="Arab" typeface="Arial"/>
+        <a:font script="Hebr" typeface="Arial"/>
+        <a:font script="Thai" typeface="Cordia New"/>
+        <a:font script="Ethi" typeface="Nyala"/>
+        <a:font script="Beng" typeface="Vrinda"/>
+        <a:font script="Gujr" typeface="Shruti"/>
+        <a:font script="Khmr" typeface="DaunPenh"/>
+        <a:font script="Knda" typeface="Tunga"/>
+        <a:font script="Guru" typeface="Raavi"/>
+        <a:font script="Cans" typeface="Euphemia"/>
+        <a:font script="Cher" typeface="Plantagenet Cherokee"/>
+        <a:font script="Yiii" typeface="Microsoft Yi Baiti"/>
+        <a:font script="Tibt" typeface="Microsoft Himalaya"/>
+        <a:font script="Thaa" typeface="MV Boli"/>
+        <a:font script="Deva" typeface="Mangal"/>
+        <a:font script="Telu" typeface="Gautami"/>
+        <a:font script="Taml" typeface="Latha"/>
+        <a:font script="Syrc" typeface="Estrangelo Edessa"/>
+        <a:font script="Orya" typeface="Kalinga"/>
+        <a:font script="Mlym" typeface="Kartika"/>
+        <a:font script="Laoo" typeface="DokChampa"/>
+        <a:font script="Sinh" typeface="Iskoola Pota"/>
+        <a:font script="Mong" typeface="Mongolian Baiti"/>
+        <a:font script="Viet" typeface="Arial"/>
+        <a:font script="Uigh" typeface="Microsoft Uighur"/>
+        <a:font script="Geor" typeface="Sylfaen"/>
+      </a:minorFont>
+    </a:fontScheme>
+    <a:fmtScheme name="Office">
+      <a:fillStyleLst>
+        <a:solidFill>
+          <a:schemeClr val="phClr"/>
+        </a:solidFill>
+        <a:gradFill rotWithShape="1">
+          <a:gsLst>
+            <a:gs pos="0">
+              <a:schemeClr val="phClr">
+                <a:lumMod val="110000"/>
+                <a:satMod val="105000"/>
+                <a:tint val="67000"/>
+              </a:schemeClr>
+            </a:gs>
+            <a:gs pos="50000">
+              <a:schemeClr val="phClr">
+                <a:lumMod val="105000"/>
+                <a:satMod val="103000"/>
+                <a:tint val="73000"/>
+              </a:schemeClr>
+            </a:gs>
+            <a:gs pos="100000">
+              <a:schemeClr val="phClr">
+                <a:lumMod val="105000"/>
+                <a:satMod val="109000"/>
+                <a:tint val="81000"/>
+              </a:schemeClr>
+            </a:gs>
+          </a:gsLst>
+          <a:lin ang="5400000" scaled="0"/>
+        </a:gradFill>
+        <a:gradFill rotWithShape="1">
+          <a:gsLst>
+            <a:gs pos="0">
+              <a:schemeClr val="phClr">
+                <a:satMod val="103000"/>
+                <a:lumMod val="102000"/>
+                <a:tint val="94000"/>
+              </a:schemeClr>
+            </a:gs>
+            <a:gs pos="50000">
+              <a:schemeClr val="phClr">
+                <a:satMod val="110000"/>
+                <a:lumMod val="100000"/>
+                <a:shade val="100000"/>
+              </a:schemeClr>
+            </a:gs>
+            <a:gs pos="100000">
+              <a:schemeClr val="phClr">
+                <a:lumMod val="99000"/>
+                <a:satMod val="120000"/>
+                <a:shade val="78000"/>
+              </a:schemeClr>
+            </a:gs>
+          </a:gsLst>
+          <a:lin ang="5400000" scaled="0"/>
+        </a:gradFill>
+      </a:fillStyleLst>
+      <a:lnStyleLst>
+        <a:ln w="6350" cap="flat" cmpd="sng" algn="ctr">
+          <a:solidFill>
+            <a:schemeClr val="phClr"/>
+          </a:solidFill>
+          <a:prstDash val="solid"/>
+          <a:miter lim="800000"/>
+        </a:ln>
+        <a:ln w="12700" cap="flat" cmpd="sng" algn="ctr">
+          <a:solidFill>
+            <a:schemeClr val="phClr"/>
+          </a:solidFill>
+          <a:prstDash val="solid"/>
+          <a:miter lim="800000"/>
+        </a:ln>
+        <a:ln w="19050" cap="flat" cmpd="sng" algn="ctr">
+          <a:solidFill>
+            <a:schemeClr val="phClr"/>
+          </a:solidFill>
+          <a:prstDash val="solid"/>
+          <a:miter lim="800000"/>
+        </a:ln>
+      </a:lnStyleLst>
+      <a:effectStyleLst>
+        <a:effectStyle>
+          <a:effectLst/>
+        </a:effectStyle>
+        <a:effectStyle>
+          <a:effectLst/>
+        </a:effectStyle>
+        <a:effectStyle>
+          <a:effectLst>
+            <a:outerShdw blurRad="57150" dist="19050" dir="5400000" algn="ctr" rotWithShape="0">
+              <a:srgbClr val="000000">
+                <a:alpha val="63000"/>
+              </a:srgbClr>
+            </a:outerShdw>
+          </a:effectLst>
+        </a:effectStyle>
+      </a:effectStyleLst>
+      <a:bgFillStyleLst>
+        <a:solidFill>
+          <a:schemeClr val="phClr"/>
+        </a:solidFill>
+        <a:solidFill>
+          <a:schemeClr val="phClr">
+            <a:tint val="95000"/>
+            <a:satMod val="170000"/>
+          </a:schemeClr>
+        </a:solidFill>
+        <a:gradFill rotWithShape="1">
+          <a:gsLst>
+            <a:gs pos="0">
+              <a:schemeClr val="phClr">
+                <a:tint val="93000"/>
+                <a:satMod val="150000"/>
+                <a:shade val="98000"/>
+                <a:lumMod val="102000"/>
+              </a:schemeClr>
+            </a:gs>
+            <a:gs pos="50000">
+              <a:schemeClr val="phClr">
+                <a:tint val="98000"/>
+                <a:satMod val="130000"/>
+                <a:shade val="90000"/>
+                <a:lumMod val="103000"/>
+              </a:schemeClr>
+            </a:gs>
+            <a:gs pos="100000">
+              <a:schemeClr val="phClr">
+                <a:shade val="63000"/>
+                <a:satMod val="120000"/>
+              </a:schemeClr>
+            </a:gs>
+          </a:gsLst>
+          <a:lin ang="5400000" scaled="0"/>
+        </a:gradFill>
+      </a:bgFillStyleLst>
+    </a:fmtScheme>
+  </a:themeElements>
+  <a:objectDefaults/>
+  <a:extraClrSchemeLst/>
+  <a:extLst>
+    <a:ext uri="{05A4C25C-085E-4340-85A3-A5531E510DB2}">
+      <thm15:themeFamily xmlns:thm15="http://schemas.microsoft.com/office/thememl/2012/main" name="Office Theme" id="{62F939B6-93AF-4DB8-9C6B-D6C7DFDC589F}" vid="{4A3C46E8-61CC-4603-A589-7422A47A8E4A}"/>
+    </a:ext>
+  </a:extLst>
+</a:theme>
 </file>